--- a/Курсач презентация.pptx
+++ b/Курсач презентация.pptx
@@ -5,27 +5,29 @@
     <p:sldMasterId id="2147483801" r:id="rId1"/>
   </p:sldMasterIdLst>
   <p:notesMasterIdLst>
-    <p:notesMasterId r:id="rId9"/>
+    <p:notesMasterId r:id="rId11"/>
   </p:notesMasterIdLst>
   <p:sldIdLst>
     <p:sldId id="256" r:id="rId2"/>
     <p:sldId id="257" r:id="rId3"/>
     <p:sldId id="258" r:id="rId4"/>
-    <p:sldId id="259" r:id="rId5"/>
-    <p:sldId id="260" r:id="rId6"/>
-    <p:sldId id="261" r:id="rId7"/>
-    <p:sldId id="262" r:id="rId8"/>
+    <p:sldId id="263" r:id="rId5"/>
+    <p:sldId id="259" r:id="rId6"/>
+    <p:sldId id="260" r:id="rId7"/>
+    <p:sldId id="264" r:id="rId8"/>
+    <p:sldId id="261" r:id="rId9"/>
+    <p:sldId id="262" r:id="rId10"/>
   </p:sldIdLst>
   <p:sldSz cx="9144000" cy="5143500" type="screen16x9"/>
   <p:notesSz cx="5143500" cy="9144000"/>
   <p:embeddedFontLst>
     <p:embeddedFont>
       <p:font typeface="Instrument Sans Medium" panose="020B0604020202020204" charset="0"/>
-      <p:regular r:id="rId10"/>
+      <p:regular r:id="rId12"/>
     </p:embeddedFont>
     <p:embeddedFont>
       <p:font typeface="Instrument Sans SemiBold" panose="020B0604020202020204" charset="0"/>
-      <p:regular r:id="rId11"/>
+      <p:regular r:id="rId13"/>
     </p:embeddedFont>
   </p:embeddedFontLst>
   <p:defaultTextStyle>
@@ -573,7 +575,7 @@
           <a:p>
             <a:fld id="{F7021451-1387-4CA6-816F-3879F97B5CBC}" type="slidenum">
               <a:rPr lang="en-US"/>
-              <a:t>4</a:t>
+              <a:t>5</a:t>
             </a:fld>
             <a:endParaRPr lang="en-US"/>
           </a:p>
@@ -657,7 +659,7 @@
           <a:p>
             <a:fld id="{F7021451-1387-4CA6-816F-3879F97B5CBC}" type="slidenum">
               <a:rPr lang="en-US"/>
-              <a:t>5</a:t>
+              <a:t>6</a:t>
             </a:fld>
             <a:endParaRPr lang="en-US"/>
           </a:p>
@@ -741,7 +743,7 @@
           <a:p>
             <a:fld id="{F7021451-1387-4CA6-816F-3879F97B5CBC}" type="slidenum">
               <a:rPr lang="en-US"/>
-              <a:t>6</a:t>
+              <a:t>7</a:t>
             </a:fld>
             <a:endParaRPr lang="en-US"/>
           </a:p>
@@ -750,7 +752,7 @@
     </p:spTree>
     <p:extLst>
       <p:ext uri="{BB962C8B-B14F-4D97-AF65-F5344CB8AC3E}">
-        <p14:creationId xmlns:p14="http://schemas.microsoft.com/office/powerpoint/2010/main" val="1024086991"/>
+        <p14:creationId xmlns:p14="http://schemas.microsoft.com/office/powerpoint/2010/main" val="1459923100"/>
       </p:ext>
     </p:extLst>
   </p:cSld>
@@ -825,7 +827,91 @@
           <a:p>
             <a:fld id="{F7021451-1387-4CA6-816F-3879F97B5CBC}" type="slidenum">
               <a:rPr lang="en-US"/>
-              <a:t>7</a:t>
+              <a:t>8</a:t>
+            </a:fld>
+            <a:endParaRPr lang="en-US"/>
+          </a:p>
+        </p:txBody>
+      </p:sp>
+    </p:spTree>
+    <p:extLst>
+      <p:ext uri="{BB962C8B-B14F-4D97-AF65-F5344CB8AC3E}">
+        <p14:creationId xmlns:p14="http://schemas.microsoft.com/office/powerpoint/2010/main" val="1024086991"/>
+      </p:ext>
+    </p:extLst>
+  </p:cSld>
+  <p:clrMapOvr>
+    <a:masterClrMapping/>
+  </p:clrMapOvr>
+</p:notes>
+</file>
+
+<file path=ppt/notesSlides/notesSlide8.xml><?xml version="1.0" encoding="utf-8"?>
+<p:notes xmlns:a="http://schemas.openxmlformats.org/drawingml/2006/main" xmlns:r="http://schemas.openxmlformats.org/officeDocument/2006/relationships" xmlns:p="http://schemas.openxmlformats.org/presentationml/2006/main">
+  <p:cSld>
+    <p:spTree>
+      <p:nvGrpSpPr>
+        <p:cNvPr id="1" name=""/>
+        <p:cNvGrpSpPr/>
+        <p:nvPr/>
+      </p:nvGrpSpPr>
+      <p:grpSpPr>
+        <a:xfrm>
+          <a:off x="0" y="0"/>
+          <a:ext cx="0" cy="0"/>
+          <a:chOff x="0" y="0"/>
+          <a:chExt cx="0" cy="0"/>
+        </a:xfrm>
+      </p:grpSpPr>
+      <p:sp>
+        <p:nvSpPr>
+          <p:cNvPr id="2" name="Slide Image Placeholder 1"/>
+          <p:cNvSpPr>
+            <a:spLocks noGrp="1" noRot="1" noChangeAspect="1"/>
+          </p:cNvSpPr>
+          <p:nvPr>
+            <p:ph type="sldImg"/>
+          </p:nvPr>
+        </p:nvSpPr>
+        <p:spPr/>
+      </p:sp>
+      <p:sp>
+        <p:nvSpPr>
+          <p:cNvPr id="3" name="Notes Placeholder 2"/>
+          <p:cNvSpPr>
+            <a:spLocks noGrp="1"/>
+          </p:cNvSpPr>
+          <p:nvPr>
+            <p:ph type="body" idx="1"/>
+          </p:nvPr>
+        </p:nvSpPr>
+        <p:spPr/>
+        <p:txBody>
+          <a:bodyPr/>
+          <a:lstStyle/>
+          <a:p>
+            <a:endParaRPr lang="en-US" dirty="0"/>
+          </a:p>
+        </p:txBody>
+      </p:sp>
+      <p:sp>
+        <p:nvSpPr>
+          <p:cNvPr id="4" name="Slide Number Placeholder 3"/>
+          <p:cNvSpPr>
+            <a:spLocks noGrp="1"/>
+          </p:cNvSpPr>
+          <p:nvPr>
+            <p:ph type="sldNum" sz="quarter" idx="10"/>
+          </p:nvPr>
+        </p:nvSpPr>
+        <p:spPr/>
+        <p:txBody>
+          <a:bodyPr/>
+          <a:lstStyle/>
+          <a:p>
+            <a:fld id="{F7021451-1387-4CA6-816F-3879F97B5CBC}" type="slidenum">
+              <a:rPr lang="en-US"/>
+              <a:t>9</a:t>
             </a:fld>
             <a:endParaRPr lang="en-US"/>
           </a:p>
@@ -991,7 +1077,7 @@
           <a:p>
             <a:fld id="{0172BA1B-1CA2-421D-801A-3B3BAF732C51}" type="datetimeFigureOut">
               <a:rPr lang="ru-RU" smtClean="0"/>
-              <a:t>24.05.2026</a:t>
+              <a:t>25.05.2026</a:t>
             </a:fld>
             <a:endParaRPr lang="ru-RU"/>
           </a:p>
@@ -1190,7 +1276,7 @@
           <a:p>
             <a:fld id="{0172BA1B-1CA2-421D-801A-3B3BAF732C51}" type="datetimeFigureOut">
               <a:rPr lang="ru-RU" smtClean="0"/>
-              <a:t>24.05.2026</a:t>
+              <a:t>25.05.2026</a:t>
             </a:fld>
             <a:endParaRPr lang="ru-RU"/>
           </a:p>
@@ -1399,7 +1485,7 @@
           <a:p>
             <a:fld id="{0172BA1B-1CA2-421D-801A-3B3BAF732C51}" type="datetimeFigureOut">
               <a:rPr lang="ru-RU" smtClean="0"/>
-              <a:t>24.05.2026</a:t>
+              <a:t>25.05.2026</a:t>
             </a:fld>
             <a:endParaRPr lang="ru-RU"/>
           </a:p>
@@ -1808,7 +1894,7 @@
           <a:p>
             <a:fld id="{0172BA1B-1CA2-421D-801A-3B3BAF732C51}" type="datetimeFigureOut">
               <a:rPr lang="ru-RU" smtClean="0"/>
-              <a:t>24.05.2026</a:t>
+              <a:t>25.05.2026</a:t>
             </a:fld>
             <a:endParaRPr lang="ru-RU"/>
           </a:p>
@@ -2084,7 +2170,7 @@
           <a:p>
             <a:fld id="{0172BA1B-1CA2-421D-801A-3B3BAF732C51}" type="datetimeFigureOut">
               <a:rPr lang="ru-RU" smtClean="0"/>
-              <a:t>24.05.2026</a:t>
+              <a:t>25.05.2026</a:t>
             </a:fld>
             <a:endParaRPr lang="ru-RU"/>
           </a:p>
@@ -2350,7 +2436,7 @@
           <a:p>
             <a:fld id="{0172BA1B-1CA2-421D-801A-3B3BAF732C51}" type="datetimeFigureOut">
               <a:rPr lang="ru-RU" smtClean="0"/>
-              <a:t>24.05.2026</a:t>
+              <a:t>25.05.2026</a:t>
             </a:fld>
             <a:endParaRPr lang="ru-RU"/>
           </a:p>
@@ -2763,7 +2849,7 @@
           <a:p>
             <a:fld id="{0172BA1B-1CA2-421D-801A-3B3BAF732C51}" type="datetimeFigureOut">
               <a:rPr lang="ru-RU" smtClean="0"/>
-              <a:t>24.05.2026</a:t>
+              <a:t>25.05.2026</a:t>
             </a:fld>
             <a:endParaRPr lang="ru-RU"/>
           </a:p>
@@ -2905,7 +2991,7 @@
           <a:p>
             <a:fld id="{0172BA1B-1CA2-421D-801A-3B3BAF732C51}" type="datetimeFigureOut">
               <a:rPr lang="ru-RU" smtClean="0"/>
-              <a:t>24.05.2026</a:t>
+              <a:t>25.05.2026</a:t>
             </a:fld>
             <a:endParaRPr lang="ru-RU"/>
           </a:p>
@@ -3019,7 +3105,7 @@
           <a:p>
             <a:fld id="{0172BA1B-1CA2-421D-801A-3B3BAF732C51}" type="datetimeFigureOut">
               <a:rPr lang="ru-RU" smtClean="0"/>
-              <a:t>24.05.2026</a:t>
+              <a:t>25.05.2026</a:t>
             </a:fld>
             <a:endParaRPr lang="ru-RU"/>
           </a:p>
@@ -3331,7 +3417,7 @@
           <a:p>
             <a:fld id="{0172BA1B-1CA2-421D-801A-3B3BAF732C51}" type="datetimeFigureOut">
               <a:rPr lang="ru-RU" smtClean="0"/>
-              <a:t>24.05.2026</a:t>
+              <a:t>25.05.2026</a:t>
             </a:fld>
             <a:endParaRPr lang="ru-RU"/>
           </a:p>
@@ -3620,7 +3706,7 @@
           <a:p>
             <a:fld id="{0172BA1B-1CA2-421D-801A-3B3BAF732C51}" type="datetimeFigureOut">
               <a:rPr lang="ru-RU" smtClean="0"/>
-              <a:t>24.05.2026</a:t>
+              <a:t>25.05.2026</a:t>
             </a:fld>
             <a:endParaRPr lang="ru-RU"/>
           </a:p>
@@ -3862,7 +3948,7 @@
           <a:p>
             <a:fld id="{0172BA1B-1CA2-421D-801A-3B3BAF732C51}" type="datetimeFigureOut">
               <a:rPr lang="ru-RU" smtClean="0"/>
-              <a:t>24.05.2026</a:t>
+              <a:t>25.05.2026</a:t>
             </a:fld>
             <a:endParaRPr lang="ru-RU"/>
           </a:p>
@@ -4514,8 +4600,8 @@
         </p:nvSpPr>
         <p:spPr>
           <a:xfrm>
-            <a:off x="457200" y="302010"/>
-            <a:ext cx="8228880" cy="602280"/>
+            <a:off x="457560" y="42194"/>
+            <a:ext cx="8228880" cy="1075406"/>
           </a:xfrm>
           <a:prstGeom prst="rect">
             <a:avLst/>
@@ -4539,7 +4625,7 @@
         </p:style>
         <p:txBody>
           <a:bodyPr lIns="0" tIns="0" rIns="0" bIns="0" anchor="t">
-            <a:normAutofit fontScale="40000" lnSpcReduction="20000"/>
+            <a:noAutofit/>
           </a:bodyPr>
           <a:lstStyle/>
           <a:p>
@@ -4552,7 +4638,7 @@
               </a:tabLst>
             </a:pPr>
             <a:r>
-              <a:rPr lang="en-US" sz="2750" dirty="0" err="1">
+              <a:rPr lang="en-US" sz="1400" dirty="0" err="1">
                 <a:solidFill>
                   <a:srgbClr val="091C53"/>
                 </a:solidFill>
@@ -4561,7 +4647,7 @@
               <a:t>Министерство</a:t>
             </a:r>
             <a:r>
-              <a:rPr lang="en-US" sz="2750" dirty="0">
+              <a:rPr lang="en-US" sz="1400" dirty="0">
                 <a:solidFill>
                   <a:srgbClr val="091C53"/>
                 </a:solidFill>
@@ -4570,7 +4656,7 @@
               <a:t> </a:t>
             </a:r>
             <a:r>
-              <a:rPr lang="en-US" sz="2750" dirty="0" err="1">
+              <a:rPr lang="en-US" sz="1400" dirty="0" err="1">
                 <a:solidFill>
                   <a:srgbClr val="091C53"/>
                 </a:solidFill>
@@ -4579,7 +4665,7 @@
               <a:t>науки</a:t>
             </a:r>
             <a:r>
-              <a:rPr lang="en-US" sz="2750" dirty="0">
+              <a:rPr lang="en-US" sz="1400" dirty="0">
                 <a:solidFill>
                   <a:srgbClr val="091C53"/>
                 </a:solidFill>
@@ -4588,7 +4674,7 @@
               <a:t> и </a:t>
             </a:r>
             <a:r>
-              <a:rPr lang="en-US" sz="2750" dirty="0" err="1">
+              <a:rPr lang="en-US" sz="1400" dirty="0" err="1">
                 <a:solidFill>
                   <a:srgbClr val="091C53"/>
                 </a:solidFill>
@@ -4597,7 +4683,7 @@
               <a:t>высшего</a:t>
             </a:r>
             <a:r>
-              <a:rPr lang="en-US" sz="2750" dirty="0">
+              <a:rPr lang="en-US" sz="1400" dirty="0">
                 <a:solidFill>
                   <a:srgbClr val="091C53"/>
                 </a:solidFill>
@@ -4606,7 +4692,7 @@
               <a:t> </a:t>
             </a:r>
             <a:r>
-              <a:rPr lang="en-US" sz="2750" dirty="0" err="1">
+              <a:rPr lang="en-US" sz="1400" dirty="0" err="1">
                 <a:solidFill>
                   <a:srgbClr val="091C53"/>
                 </a:solidFill>
@@ -4615,7 +4701,7 @@
               <a:t>образования</a:t>
             </a:r>
             <a:r>
-              <a:rPr lang="en-US" sz="2750" dirty="0">
+              <a:rPr lang="en-US" sz="1400" dirty="0">
                 <a:solidFill>
                   <a:srgbClr val="091C53"/>
                 </a:solidFill>
@@ -4624,7 +4710,7 @@
               <a:t> </a:t>
             </a:r>
             <a:r>
-              <a:rPr lang="en-US" sz="2750" dirty="0" err="1">
+              <a:rPr lang="en-US" sz="1400" dirty="0" err="1">
                 <a:solidFill>
                   <a:srgbClr val="091C53"/>
                 </a:solidFill>
@@ -4633,7 +4719,7 @@
               <a:t>Российской</a:t>
             </a:r>
             <a:r>
-              <a:rPr lang="en-US" sz="2750" dirty="0">
+              <a:rPr lang="en-US" sz="1400" dirty="0">
                 <a:solidFill>
                   <a:srgbClr val="091C53"/>
                 </a:solidFill>
@@ -4642,7 +4728,7 @@
               <a:t> </a:t>
             </a:r>
             <a:r>
-              <a:rPr lang="en-US" sz="2750" dirty="0" err="1">
+              <a:rPr lang="en-US" sz="1400" dirty="0" err="1">
                 <a:solidFill>
                   <a:srgbClr val="091C53"/>
                 </a:solidFill>
@@ -4651,7 +4737,7 @@
               <a:t>Федерации</a:t>
             </a:r>
             <a:r>
-              <a:rPr lang="en-US" sz="2750" dirty="0">
+              <a:rPr lang="en-US" sz="1400" dirty="0">
                 <a:solidFill>
                   <a:srgbClr val="091C53"/>
                 </a:solidFill>
@@ -4660,7 +4746,7 @@
               <a:t> </a:t>
             </a:r>
             <a:r>
-              <a:rPr lang="en-US" sz="2750" dirty="0" err="1">
+              <a:rPr lang="en-US" sz="1400" dirty="0" err="1">
                 <a:solidFill>
                   <a:srgbClr val="091C53"/>
                 </a:solidFill>
@@ -4669,7 +4755,7 @@
               <a:t>Муромский</a:t>
             </a:r>
             <a:r>
-              <a:rPr lang="en-US" sz="2750" dirty="0">
+              <a:rPr lang="en-US" sz="1400" dirty="0">
                 <a:solidFill>
                   <a:srgbClr val="091C53"/>
                 </a:solidFill>
@@ -4678,7 +4764,7 @@
               <a:t> </a:t>
             </a:r>
             <a:r>
-              <a:rPr lang="en-US" sz="2750" dirty="0" err="1">
+              <a:rPr lang="en-US" sz="1400" dirty="0" err="1">
                 <a:solidFill>
                   <a:srgbClr val="091C53"/>
                 </a:solidFill>
@@ -4687,7 +4773,7 @@
               <a:t>институт</a:t>
             </a:r>
             <a:r>
-              <a:rPr lang="en-US" sz="2750" dirty="0">
+              <a:rPr lang="en-US" sz="1400" dirty="0">
                 <a:solidFill>
                   <a:srgbClr val="091C53"/>
                 </a:solidFill>
@@ -4696,7 +4782,7 @@
               <a:t> (</a:t>
             </a:r>
             <a:r>
-              <a:rPr lang="en-US" sz="2750" dirty="0" err="1">
+              <a:rPr lang="en-US" sz="1400" dirty="0" err="1">
                 <a:solidFill>
                   <a:srgbClr val="091C53"/>
                 </a:solidFill>
@@ -4705,7 +4791,7 @@
               <a:t>филиал</a:t>
             </a:r>
             <a:r>
-              <a:rPr lang="en-US" sz="2750" dirty="0">
+              <a:rPr lang="en-US" sz="1400" dirty="0">
                 <a:solidFill>
                   <a:srgbClr val="091C53"/>
                 </a:solidFill>
@@ -4714,7 +4800,7 @@
               <a:t>) </a:t>
             </a:r>
             <a:r>
-              <a:rPr lang="en-US" sz="2750" dirty="0" err="1">
+              <a:rPr lang="en-US" sz="1400" dirty="0" err="1">
                 <a:solidFill>
                   <a:srgbClr val="091C53"/>
                 </a:solidFill>
@@ -4723,7 +4809,7 @@
               <a:t>федерального</a:t>
             </a:r>
             <a:r>
-              <a:rPr lang="en-US" sz="2750" dirty="0">
+              <a:rPr lang="en-US" sz="1400" dirty="0">
                 <a:solidFill>
                   <a:srgbClr val="091C53"/>
                 </a:solidFill>
@@ -4732,7 +4818,7 @@
               <a:t> </a:t>
             </a:r>
             <a:r>
-              <a:rPr lang="en-US" sz="2750" dirty="0" err="1">
+              <a:rPr lang="en-US" sz="1400" dirty="0" err="1">
                 <a:solidFill>
                   <a:srgbClr val="091C53"/>
                 </a:solidFill>
@@ -4741,7 +4827,7 @@
               <a:t>государственного</a:t>
             </a:r>
             <a:r>
-              <a:rPr lang="en-US" sz="2750" dirty="0">
+              <a:rPr lang="en-US" sz="1400" dirty="0">
                 <a:solidFill>
                   <a:srgbClr val="091C53"/>
                 </a:solidFill>
@@ -4750,7 +4836,7 @@
               <a:t> </a:t>
             </a:r>
             <a:r>
-              <a:rPr lang="en-US" sz="2750" dirty="0" err="1">
+              <a:rPr lang="en-US" sz="1400" dirty="0" err="1">
                 <a:solidFill>
                   <a:srgbClr val="091C53"/>
                 </a:solidFill>
@@ -4759,7 +4845,7 @@
               <a:t>бюджетного</a:t>
             </a:r>
             <a:r>
-              <a:rPr lang="en-US" sz="2750" dirty="0">
+              <a:rPr lang="en-US" sz="1400" dirty="0">
                 <a:solidFill>
                   <a:srgbClr val="091C53"/>
                 </a:solidFill>
@@ -4768,7 +4854,7 @@
               <a:t> </a:t>
             </a:r>
             <a:r>
-              <a:rPr lang="en-US" sz="2750" dirty="0" err="1">
+              <a:rPr lang="en-US" sz="1400" dirty="0" err="1">
                 <a:solidFill>
                   <a:srgbClr val="091C53"/>
                 </a:solidFill>
@@ -4777,7 +4863,7 @@
               <a:t>образовательного</a:t>
             </a:r>
             <a:r>
-              <a:rPr lang="en-US" sz="2750" dirty="0">
+              <a:rPr lang="en-US" sz="1400" dirty="0">
                 <a:solidFill>
                   <a:srgbClr val="091C53"/>
                 </a:solidFill>
@@ -4786,7 +4872,7 @@
               <a:t> </a:t>
             </a:r>
             <a:r>
-              <a:rPr lang="en-US" sz="2750" dirty="0" err="1">
+              <a:rPr lang="en-US" sz="1400" dirty="0" err="1">
                 <a:solidFill>
                   <a:srgbClr val="091C53"/>
                 </a:solidFill>
@@ -4795,7 +4881,7 @@
               <a:t>учреждения</a:t>
             </a:r>
             <a:r>
-              <a:rPr lang="en-US" sz="2750" dirty="0">
+              <a:rPr lang="en-US" sz="1400" dirty="0">
                 <a:solidFill>
                   <a:srgbClr val="091C53"/>
                 </a:solidFill>
@@ -4804,7 +4890,7 @@
               <a:t> </a:t>
             </a:r>
             <a:r>
-              <a:rPr lang="en-US" sz="2750" dirty="0" err="1">
+              <a:rPr lang="en-US" sz="1400" dirty="0" err="1">
                 <a:solidFill>
                   <a:srgbClr val="091C53"/>
                 </a:solidFill>
@@ -4813,7 +4899,7 @@
               <a:t>высшего</a:t>
             </a:r>
             <a:r>
-              <a:rPr lang="en-US" sz="2750" dirty="0">
+              <a:rPr lang="en-US" sz="1400" dirty="0">
                 <a:solidFill>
                   <a:srgbClr val="091C53"/>
                 </a:solidFill>
@@ -4822,7 +4908,7 @@
               <a:t> </a:t>
             </a:r>
             <a:r>
-              <a:rPr lang="en-US" sz="2750" dirty="0" err="1">
+              <a:rPr lang="en-US" sz="1400" dirty="0" err="1">
                 <a:solidFill>
                   <a:srgbClr val="091C53"/>
                 </a:solidFill>
@@ -4831,7 +4917,7 @@
               <a:t>образования</a:t>
             </a:r>
             <a:r>
-              <a:rPr lang="en-US" sz="2750" dirty="0">
+              <a:rPr lang="en-US" sz="1400" dirty="0">
                 <a:solidFill>
                   <a:srgbClr val="091C53"/>
                 </a:solidFill>
@@ -4840,7 +4926,7 @@
               <a:t> «</a:t>
             </a:r>
             <a:r>
-              <a:rPr lang="en-US" sz="2750" dirty="0" err="1">
+              <a:rPr lang="en-US" sz="1400" dirty="0" err="1">
                 <a:solidFill>
                   <a:srgbClr val="091C53"/>
                 </a:solidFill>
@@ -4849,7 +4935,7 @@
               <a:t>Владимирский</a:t>
             </a:r>
             <a:r>
-              <a:rPr lang="en-US" sz="2750" dirty="0">
+              <a:rPr lang="en-US" sz="1400" dirty="0">
                 <a:solidFill>
                   <a:srgbClr val="091C53"/>
                 </a:solidFill>
@@ -4858,7 +4944,7 @@
               <a:t> </a:t>
             </a:r>
             <a:r>
-              <a:rPr lang="en-US" sz="2750" dirty="0" err="1">
+              <a:rPr lang="en-US" sz="1400" dirty="0" err="1">
                 <a:solidFill>
                   <a:srgbClr val="091C53"/>
                 </a:solidFill>
@@ -4867,7 +4953,7 @@
               <a:t>государственный</a:t>
             </a:r>
             <a:r>
-              <a:rPr lang="en-US" sz="2750" dirty="0">
+              <a:rPr lang="en-US" sz="1400" dirty="0">
                 <a:solidFill>
                   <a:srgbClr val="091C53"/>
                 </a:solidFill>
@@ -4876,7 +4962,7 @@
               <a:t> </a:t>
             </a:r>
             <a:r>
-              <a:rPr lang="en-US" sz="2750" dirty="0" err="1">
+              <a:rPr lang="en-US" sz="1400" dirty="0" err="1">
                 <a:solidFill>
                   <a:srgbClr val="091C53"/>
                 </a:solidFill>
@@ -4885,7 +4971,7 @@
               <a:t>университет</a:t>
             </a:r>
             <a:r>
-              <a:rPr lang="en-US" sz="2750" dirty="0">
+              <a:rPr lang="en-US" sz="1400" dirty="0">
                 <a:solidFill>
                   <a:srgbClr val="091C53"/>
                 </a:solidFill>
@@ -4894,7 +4980,7 @@
               <a:t> </a:t>
             </a:r>
             <a:r>
-              <a:rPr lang="en-US" sz="2750" dirty="0" err="1">
+              <a:rPr lang="en-US" sz="1400" dirty="0" err="1">
                 <a:solidFill>
                   <a:srgbClr val="091C53"/>
                 </a:solidFill>
@@ -4903,7 +4989,7 @@
               <a:t>имени</a:t>
             </a:r>
             <a:r>
-              <a:rPr lang="en-US" sz="2750" dirty="0">
+              <a:rPr lang="en-US" sz="1400" dirty="0">
                 <a:solidFill>
                   <a:srgbClr val="091C53"/>
                 </a:solidFill>
@@ -4912,7 +4998,7 @@
               <a:t> </a:t>
             </a:r>
             <a:r>
-              <a:rPr lang="en-US" sz="2750" dirty="0" err="1">
+              <a:rPr lang="en-US" sz="1400" dirty="0" err="1">
                 <a:solidFill>
                   <a:srgbClr val="091C53"/>
                 </a:solidFill>
@@ -4921,7 +5007,7 @@
               <a:t>Александра</a:t>
             </a:r>
             <a:r>
-              <a:rPr lang="en-US" sz="2750" dirty="0">
+              <a:rPr lang="en-US" sz="1400" dirty="0">
                 <a:solidFill>
                   <a:srgbClr val="091C53"/>
                 </a:solidFill>
@@ -4930,7 +5016,7 @@
               <a:t> </a:t>
             </a:r>
             <a:r>
-              <a:rPr lang="en-US" sz="2750" dirty="0" err="1">
+              <a:rPr lang="en-US" sz="1400" dirty="0" err="1">
                 <a:solidFill>
                   <a:srgbClr val="091C53"/>
                 </a:solidFill>
@@ -4939,7 +5025,7 @@
               <a:t>Григорьевича</a:t>
             </a:r>
             <a:r>
-              <a:rPr lang="en-US" sz="2750" dirty="0">
+              <a:rPr lang="en-US" sz="1400" dirty="0">
                 <a:solidFill>
                   <a:srgbClr val="091C53"/>
                 </a:solidFill>
@@ -4948,7 +5034,7 @@
               <a:t> и </a:t>
             </a:r>
             <a:r>
-              <a:rPr lang="en-US" sz="2750" dirty="0" err="1">
+              <a:rPr lang="en-US" sz="1400" dirty="0" err="1">
                 <a:solidFill>
                   <a:srgbClr val="091C53"/>
                 </a:solidFill>
@@ -4957,7 +5043,7 @@
               <a:t>Николая</a:t>
             </a:r>
             <a:r>
-              <a:rPr lang="en-US" sz="2750" dirty="0">
+              <a:rPr lang="en-US" sz="1400" dirty="0">
                 <a:solidFill>
                   <a:srgbClr val="091C53"/>
                 </a:solidFill>
@@ -4966,7 +5052,7 @@
               <a:t> </a:t>
             </a:r>
             <a:r>
-              <a:rPr lang="en-US" sz="2750" dirty="0" err="1">
+              <a:rPr lang="en-US" sz="1400" dirty="0" err="1">
                 <a:solidFill>
                   <a:srgbClr val="091C53"/>
                 </a:solidFill>
@@ -4975,7 +5061,7 @@
               <a:t>Григорьевича</a:t>
             </a:r>
             <a:r>
-              <a:rPr lang="en-US" sz="2750" dirty="0">
+              <a:rPr lang="en-US" sz="1400" dirty="0">
                 <a:solidFill>
                   <a:srgbClr val="091C53"/>
                 </a:solidFill>
@@ -4984,7 +5070,7 @@
               <a:t> </a:t>
             </a:r>
             <a:r>
-              <a:rPr lang="en-US" sz="2750" dirty="0" err="1">
+              <a:rPr lang="en-US" sz="1400" dirty="0" err="1">
                 <a:solidFill>
                   <a:srgbClr val="091C53"/>
                 </a:solidFill>
@@ -4993,7 +5079,7 @@
               <a:t>Столетовых</a:t>
             </a:r>
             <a:r>
-              <a:rPr lang="en-US" sz="2750" dirty="0">
+              <a:rPr lang="en-US" sz="1400" dirty="0">
                 <a:solidFill>
                   <a:srgbClr val="091C53"/>
                 </a:solidFill>
@@ -5002,7 +5088,7 @@
               <a:t>» (МИ </a:t>
             </a:r>
             <a:r>
-              <a:rPr lang="en-US" sz="2750" dirty="0" err="1">
+              <a:rPr lang="en-US" sz="1400" dirty="0" err="1">
                 <a:solidFill>
                   <a:srgbClr val="091C53"/>
                 </a:solidFill>
@@ -5011,7 +5097,7 @@
               <a:t>ВлГУ</a:t>
             </a:r>
             <a:r>
-              <a:rPr lang="en-US" sz="2750" dirty="0">
+              <a:rPr lang="en-US" sz="1400" dirty="0">
                 <a:solidFill>
                   <a:srgbClr val="091C53"/>
                 </a:solidFill>
@@ -5019,7 +5105,37 @@
               </a:rPr>
               <a:t>)</a:t>
             </a:r>
-            <a:endParaRPr lang="ru-RU" sz="2750" dirty="0">
+            <a:endParaRPr lang="ru-RU" sz="1400" dirty="0">
+              <a:solidFill>
+                <a:srgbClr val="091C53"/>
+              </a:solidFill>
+            </a:endParaRPr>
+          </a:p>
+          <a:p>
+            <a:pPr algn="ctr">
+              <a:lnSpc>
+                <a:spcPct val="104000"/>
+              </a:lnSpc>
+              <a:tabLst>
+                <a:tab pos="0" algn="l"/>
+              </a:tabLst>
+            </a:pPr>
+            <a:endParaRPr lang="ru-RU" sz="1400" dirty="0">
+              <a:solidFill>
+                <a:srgbClr val="091C53"/>
+              </a:solidFill>
+            </a:endParaRPr>
+          </a:p>
+          <a:p>
+            <a:pPr algn="ctr">
+              <a:lnSpc>
+                <a:spcPct val="104000"/>
+              </a:lnSpc>
+              <a:tabLst>
+                <a:tab pos="0" algn="l"/>
+              </a:tabLst>
+            </a:pPr>
+            <a:endParaRPr lang="ru-RU" sz="1400" dirty="0">
               <a:solidFill>
                 <a:srgbClr val="091C53"/>
               </a:solidFill>
@@ -5122,56 +5238,20 @@
       </p:grpSpPr>
       <p:sp>
         <p:nvSpPr>
-          <p:cNvPr id="2" name="Text 0"/>
+          <p:cNvPr id="17" name="Shape 1">
+            <a:extLst>
+              <a:ext uri="{FF2B5EF4-FFF2-40B4-BE49-F238E27FC236}">
+                <a16:creationId xmlns:a16="http://schemas.microsoft.com/office/drawing/2014/main" id="{CFD873AD-455F-C212-0A91-F945D451844B}"/>
+              </a:ext>
+            </a:extLst>
+          </p:cNvPr>
           <p:cNvSpPr/>
           <p:nvPr/>
         </p:nvSpPr>
         <p:spPr>
           <a:xfrm>
-            <a:off x="496119" y="875109"/>
-            <a:ext cx="4001319" cy="442987"/>
-          </a:xfrm>
-          <a:prstGeom prst="rect">
-            <a:avLst/>
-          </a:prstGeom>
-          <a:noFill/>
-          <a:ln/>
-        </p:spPr>
-        <p:txBody>
-          <a:bodyPr wrap="none" lIns="0" tIns="0" rIns="0" bIns="0" rtlCol="0" anchor="t"/>
-          <a:lstStyle/>
-          <a:p>
-            <a:pPr marL="0" indent="0" algn="l">
-              <a:lnSpc>
-                <a:spcPct val="104000"/>
-              </a:lnSpc>
-              <a:buNone/>
-            </a:pPr>
-            <a:r>
-              <a:rPr lang="en-US" sz="2750" dirty="0">
-                <a:solidFill>
-                  <a:srgbClr val="091C53"/>
-                </a:solidFill>
-                <a:latin typeface="Instrument Sans SemiBold" pitchFamily="34" charset="0"/>
-                <a:ea typeface="Instrument Sans SemiBold" pitchFamily="34" charset="-122"/>
-                <a:cs typeface="Instrument Sans SemiBold" pitchFamily="34" charset="-120"/>
-              </a:rPr>
-              <a:t>Актуальность и цель</a:t>
-            </a:r>
-            <a:endParaRPr lang="en-US" sz="2750" dirty="0"/>
-          </a:p>
-        </p:txBody>
-      </p:sp>
-      <p:sp>
-        <p:nvSpPr>
-          <p:cNvPr id="3" name="Shape 1"/>
-          <p:cNvSpPr/>
-          <p:nvPr/>
-        </p:nvSpPr>
-        <p:spPr>
-          <a:xfrm>
-            <a:off x="496119" y="1690167"/>
-            <a:ext cx="3902943" cy="1138461"/>
+            <a:off x="2607245" y="3006650"/>
+            <a:ext cx="3902943" cy="1795463"/>
           </a:xfrm>
           <a:prstGeom prst="roundRect">
             <a:avLst>
@@ -5191,14 +5271,14 @@
       </p:sp>
       <p:sp>
         <p:nvSpPr>
-          <p:cNvPr id="4" name="Text 2"/>
+          <p:cNvPr id="2" name="Text 0"/>
           <p:cNvSpPr/>
           <p:nvPr/>
         </p:nvSpPr>
         <p:spPr>
           <a:xfrm>
-            <a:off x="656927" y="1850975"/>
-            <a:ext cx="1772022" cy="221456"/>
+            <a:off x="0" y="2969"/>
+            <a:ext cx="9144000" cy="687065"/>
           </a:xfrm>
           <a:prstGeom prst="rect">
             <a:avLst/>
@@ -5210,81 +5290,37 @@
           <a:bodyPr wrap="none" lIns="0" tIns="0" rIns="0" bIns="0" rtlCol="0" anchor="t"/>
           <a:lstStyle/>
           <a:p>
-            <a:pPr marL="0" indent="0" algn="l">
+            <a:pPr marL="0" indent="0" algn="ctr">
               <a:lnSpc>
                 <a:spcPct val="104000"/>
               </a:lnSpc>
               <a:buNone/>
             </a:pPr>
             <a:r>
-              <a:rPr lang="en-US" sz="1350" dirty="0">
-                <a:solidFill>
-                  <a:srgbClr val="1E3063"/>
+              <a:rPr lang="en-US" sz="2800" dirty="0">
+                <a:solidFill>
+                  <a:srgbClr val="091C53"/>
                 </a:solidFill>
                 <a:latin typeface="Instrument Sans SemiBold" pitchFamily="34" charset="0"/>
                 <a:ea typeface="Instrument Sans SemiBold" pitchFamily="34" charset="-122"/>
                 <a:cs typeface="Instrument Sans SemiBold" pitchFamily="34" charset="-120"/>
               </a:rPr>
-              <a:t>Актуальность</a:t>
-            </a:r>
-            <a:endParaRPr lang="en-US" sz="1350" dirty="0"/>
-          </a:p>
-        </p:txBody>
-      </p:sp>
-      <p:sp>
-        <p:nvSpPr>
-          <p:cNvPr id="5" name="Text 3"/>
+              <a:t>Актуальность и цель</a:t>
+            </a:r>
+            <a:endParaRPr lang="en-US" sz="2800" dirty="0"/>
+          </a:p>
+        </p:txBody>
+      </p:sp>
+      <p:sp>
+        <p:nvSpPr>
+          <p:cNvPr id="3" name="Shape 1"/>
           <p:cNvSpPr/>
           <p:nvPr/>
         </p:nvSpPr>
         <p:spPr>
           <a:xfrm>
-            <a:off x="656927" y="2214190"/>
-            <a:ext cx="3581326" cy="453628"/>
-          </a:xfrm>
-          <a:prstGeom prst="rect">
-            <a:avLst/>
-          </a:prstGeom>
-          <a:noFill/>
-          <a:ln/>
-        </p:spPr>
-        <p:txBody>
-          <a:bodyPr wrap="square" lIns="0" tIns="0" rIns="0" bIns="0" rtlCol="0" anchor="t">
-            <a:normAutofit/>
-          </a:bodyPr>
-          <a:lstStyle/>
-          <a:p>
-            <a:pPr marL="0" indent="0" algn="l">
-              <a:lnSpc>
-                <a:spcPct val="133000"/>
-              </a:lnSpc>
-              <a:buNone/>
-            </a:pPr>
-            <a:r>
-              <a:rPr lang="en-US" sz="1100" dirty="0">
-                <a:solidFill>
-                  <a:srgbClr val="1E3063"/>
-                </a:solidFill>
-                <a:latin typeface="Instrument Sans Medium" pitchFamily="34" charset="0"/>
-                <a:ea typeface="Instrument Sans Medium" pitchFamily="34" charset="-122"/>
-                <a:cs typeface="Instrument Sans Medium" pitchFamily="34" charset="-120"/>
-              </a:rPr>
-              <a:t>Временные почты используются для фейковых учётных записей, спама и обхода ограничений.</a:t>
-            </a:r>
-            <a:endParaRPr lang="en-US" sz="1100" dirty="0"/>
-          </a:p>
-        </p:txBody>
-      </p:sp>
-      <p:sp>
-        <p:nvSpPr>
-          <p:cNvPr id="6" name="Shape 4"/>
-          <p:cNvSpPr/>
-          <p:nvPr/>
-        </p:nvSpPr>
-        <p:spPr>
-          <a:xfrm>
-            <a:off x="496119" y="2970386"/>
-            <a:ext cx="3902943" cy="1138461"/>
+            <a:off x="895352" y="776287"/>
+            <a:ext cx="3351981" cy="1795463"/>
           </a:xfrm>
           <a:prstGeom prst="roundRect">
             <a:avLst>
@@ -5304,13 +5340,13 @@
       </p:sp>
       <p:sp>
         <p:nvSpPr>
-          <p:cNvPr id="7" name="Text 5"/>
+          <p:cNvPr id="4" name="Text 2"/>
           <p:cNvSpPr/>
           <p:nvPr/>
         </p:nvSpPr>
         <p:spPr>
           <a:xfrm>
-            <a:off x="656927" y="3131195"/>
+            <a:off x="1685331" y="868275"/>
             <a:ext cx="1772022" cy="221456"/>
           </a:xfrm>
           <a:prstGeom prst="rect">
@@ -5323,14 +5359,14 @@
           <a:bodyPr wrap="none" lIns="0" tIns="0" rIns="0" bIns="0" rtlCol="0" anchor="t"/>
           <a:lstStyle/>
           <a:p>
-            <a:pPr marL="0" indent="0" algn="l">
+            <a:pPr marL="0" indent="0" algn="ctr">
               <a:lnSpc>
                 <a:spcPct val="104000"/>
               </a:lnSpc>
               <a:buNone/>
             </a:pPr>
             <a:r>
-              <a:rPr lang="en-US" sz="1350" dirty="0">
+              <a:rPr lang="en-US" sz="1600" b="1" dirty="0">
                 <a:solidFill>
                   <a:srgbClr val="1E3063"/>
                 </a:solidFill>
@@ -5338,22 +5374,33 @@
                 <a:ea typeface="Instrument Sans SemiBold" pitchFamily="34" charset="-122"/>
                 <a:cs typeface="Instrument Sans SemiBold" pitchFamily="34" charset="-120"/>
               </a:rPr>
-              <a:t>Цель</a:t>
-            </a:r>
-            <a:endParaRPr lang="en-US" sz="1350" dirty="0"/>
-          </a:p>
-        </p:txBody>
-      </p:sp>
-      <p:sp>
-        <p:nvSpPr>
-          <p:cNvPr id="8" name="Text 6"/>
+              <a:t>🔴 </a:t>
+            </a:r>
+            <a:r>
+              <a:rPr lang="en-US" sz="1600" b="1" dirty="0" err="1">
+                <a:solidFill>
+                  <a:srgbClr val="1E3063"/>
+                </a:solidFill>
+                <a:latin typeface="Instrument Sans SemiBold" pitchFamily="34" charset="0"/>
+                <a:ea typeface="Instrument Sans SemiBold" pitchFamily="34" charset="-122"/>
+                <a:cs typeface="Instrument Sans SemiBold" pitchFamily="34" charset="-120"/>
+              </a:rPr>
+              <a:t>Актуальность</a:t>
+            </a:r>
+            <a:endParaRPr lang="en-US" sz="1600" b="1" dirty="0"/>
+          </a:p>
+        </p:txBody>
+      </p:sp>
+      <p:sp>
+        <p:nvSpPr>
+          <p:cNvPr id="5" name="Text 3"/>
           <p:cNvSpPr/>
           <p:nvPr/>
         </p:nvSpPr>
         <p:spPr>
           <a:xfrm>
-            <a:off x="656927" y="3494410"/>
-            <a:ext cx="3581326" cy="453628"/>
+            <a:off x="1056160" y="1181719"/>
+            <a:ext cx="3038773" cy="1144440"/>
           </a:xfrm>
           <a:prstGeom prst="rect">
             <a:avLst/>
@@ -5363,7 +5410,7 @@
         </p:spPr>
         <p:txBody>
           <a:bodyPr wrap="square" lIns="0" tIns="0" rIns="0" bIns="0" rtlCol="0" anchor="t">
-            <a:normAutofit/>
+            <a:noAutofit/>
           </a:bodyPr>
           <a:lstStyle/>
           <a:p>
@@ -5374,7 +5421,7 @@
               <a:buNone/>
             </a:pPr>
             <a:r>
-              <a:rPr lang="en-US" sz="1100" dirty="0">
+              <a:rPr lang="en-US" sz="1400" dirty="0">
                 <a:solidFill>
                   <a:srgbClr val="1E3063"/>
                 </a:solidFill>
@@ -5382,22 +5429,205 @@
                 <a:ea typeface="Instrument Sans Medium" pitchFamily="34" charset="-122"/>
                 <a:cs typeface="Instrument Sans Medium" pitchFamily="34" charset="-120"/>
               </a:rPr>
-              <a:t>Создать настольное GUI‑приложение на C++/MFC для автоматической детекции disposable email.</a:t>
-            </a:r>
-            <a:endParaRPr lang="en-US" sz="1100" dirty="0"/>
-          </a:p>
-        </p:txBody>
-      </p:sp>
-      <p:sp>
-        <p:nvSpPr>
-          <p:cNvPr id="9" name="Text 7"/>
+              <a:t>Временные почты </a:t>
+            </a:r>
+            <a:r>
+              <a:rPr lang="en-US" sz="1400" dirty="0" err="1">
+                <a:solidFill>
+                  <a:srgbClr val="1E3063"/>
+                </a:solidFill>
+                <a:latin typeface="Instrument Sans Medium" pitchFamily="34" charset="0"/>
+                <a:ea typeface="Instrument Sans Medium" pitchFamily="34" charset="-122"/>
+                <a:cs typeface="Instrument Sans Medium" pitchFamily="34" charset="-120"/>
+              </a:rPr>
+              <a:t>используются</a:t>
+            </a:r>
+            <a:r>
+              <a:rPr lang="en-US" sz="1400" dirty="0">
+                <a:solidFill>
+                  <a:srgbClr val="1E3063"/>
+                </a:solidFill>
+                <a:latin typeface="Instrument Sans Medium" pitchFamily="34" charset="0"/>
+                <a:ea typeface="Instrument Sans Medium" pitchFamily="34" charset="-122"/>
+                <a:cs typeface="Instrument Sans Medium" pitchFamily="34" charset="-120"/>
+              </a:rPr>
+              <a:t> </a:t>
+            </a:r>
+            <a:r>
+              <a:rPr lang="en-US" sz="1400" dirty="0" err="1">
+                <a:solidFill>
+                  <a:srgbClr val="1E3063"/>
+                </a:solidFill>
+                <a:latin typeface="Instrument Sans Medium" pitchFamily="34" charset="0"/>
+                <a:ea typeface="Instrument Sans Medium" pitchFamily="34" charset="-122"/>
+                <a:cs typeface="Instrument Sans Medium" pitchFamily="34" charset="-120"/>
+              </a:rPr>
+              <a:t>для</a:t>
+            </a:r>
+            <a:r>
+              <a:rPr lang="ru-RU" sz="1400" dirty="0">
+                <a:solidFill>
+                  <a:srgbClr val="1E3063"/>
+                </a:solidFill>
+                <a:latin typeface="Instrument Sans Medium" pitchFamily="34" charset="0"/>
+                <a:ea typeface="Instrument Sans Medium" pitchFamily="34" charset="-122"/>
+                <a:cs typeface="Instrument Sans Medium" pitchFamily="34" charset="-120"/>
+              </a:rPr>
+              <a:t>:</a:t>
+            </a:r>
+          </a:p>
+          <a:p>
+            <a:pPr marL="285750" indent="-285750" algn="l">
+              <a:lnSpc>
+                <a:spcPct val="133000"/>
+              </a:lnSpc>
+              <a:buFont typeface="Arial" panose="020B0604020202020204" pitchFamily="34" charset="0"/>
+              <a:buChar char="•"/>
+            </a:pPr>
+            <a:r>
+              <a:rPr lang="en-US" sz="1400" dirty="0" err="1">
+                <a:solidFill>
+                  <a:srgbClr val="1E3063"/>
+                </a:solidFill>
+                <a:latin typeface="Instrument Sans Medium" pitchFamily="34" charset="0"/>
+                <a:ea typeface="Instrument Sans Medium" pitchFamily="34" charset="-122"/>
+                <a:cs typeface="Instrument Sans Medium" pitchFamily="34" charset="-120"/>
+              </a:rPr>
+              <a:t>фейковых</a:t>
+            </a:r>
+            <a:r>
+              <a:rPr lang="en-US" sz="1400" dirty="0">
+                <a:solidFill>
+                  <a:srgbClr val="1E3063"/>
+                </a:solidFill>
+                <a:latin typeface="Instrument Sans Medium" pitchFamily="34" charset="0"/>
+                <a:ea typeface="Instrument Sans Medium" pitchFamily="34" charset="-122"/>
+                <a:cs typeface="Instrument Sans Medium" pitchFamily="34" charset="-120"/>
+              </a:rPr>
+              <a:t> учётных записей, </a:t>
+            </a:r>
+            <a:endParaRPr lang="ru-RU" sz="1400" dirty="0">
+              <a:solidFill>
+                <a:srgbClr val="1E3063"/>
+              </a:solidFill>
+              <a:latin typeface="Instrument Sans Medium" pitchFamily="34" charset="0"/>
+              <a:ea typeface="Instrument Sans Medium" pitchFamily="34" charset="-122"/>
+              <a:cs typeface="Instrument Sans Medium" pitchFamily="34" charset="-120"/>
+            </a:endParaRPr>
+          </a:p>
+          <a:p>
+            <a:pPr marL="285750" indent="-285750" algn="l">
+              <a:lnSpc>
+                <a:spcPct val="133000"/>
+              </a:lnSpc>
+              <a:buFont typeface="Arial" panose="020B0604020202020204" pitchFamily="34" charset="0"/>
+              <a:buChar char="•"/>
+            </a:pPr>
+            <a:r>
+              <a:rPr lang="ru-RU" sz="1400" dirty="0">
+                <a:solidFill>
+                  <a:srgbClr val="1E3063"/>
+                </a:solidFill>
+                <a:latin typeface="Instrument Sans Medium" pitchFamily="34" charset="0"/>
+                <a:ea typeface="Instrument Sans Medium" pitchFamily="34" charset="-122"/>
+                <a:cs typeface="Instrument Sans Medium" pitchFamily="34" charset="-120"/>
+              </a:rPr>
+              <a:t>с</a:t>
+            </a:r>
+            <a:r>
+              <a:rPr lang="en-US" sz="1400" dirty="0" err="1">
+                <a:solidFill>
+                  <a:srgbClr val="1E3063"/>
+                </a:solidFill>
+                <a:latin typeface="Instrument Sans Medium" pitchFamily="34" charset="0"/>
+                <a:ea typeface="Instrument Sans Medium" pitchFamily="34" charset="-122"/>
+                <a:cs typeface="Instrument Sans Medium" pitchFamily="34" charset="-120"/>
+              </a:rPr>
+              <a:t>пама</a:t>
+            </a:r>
+            <a:r>
+              <a:rPr lang="ru-RU" sz="1400" dirty="0">
+                <a:solidFill>
+                  <a:srgbClr val="1E3063"/>
+                </a:solidFill>
+                <a:latin typeface="Instrument Sans Medium" pitchFamily="34" charset="0"/>
+                <a:ea typeface="Instrument Sans Medium" pitchFamily="34" charset="-122"/>
+                <a:cs typeface="Instrument Sans Medium" pitchFamily="34" charset="-120"/>
+              </a:rPr>
+              <a:t>,</a:t>
+            </a:r>
+          </a:p>
+          <a:p>
+            <a:pPr marL="285750" indent="-285750" algn="l">
+              <a:lnSpc>
+                <a:spcPct val="133000"/>
+              </a:lnSpc>
+              <a:buFont typeface="Arial" panose="020B0604020202020204" pitchFamily="34" charset="0"/>
+              <a:buChar char="•"/>
+            </a:pPr>
+            <a:r>
+              <a:rPr lang="en-US" sz="1400" dirty="0" err="1">
+                <a:solidFill>
+                  <a:srgbClr val="1E3063"/>
+                </a:solidFill>
+                <a:latin typeface="Instrument Sans Medium" pitchFamily="34" charset="0"/>
+                <a:ea typeface="Instrument Sans Medium" pitchFamily="34" charset="-122"/>
+                <a:cs typeface="Instrument Sans Medium" pitchFamily="34" charset="-120"/>
+              </a:rPr>
+              <a:t>обхода</a:t>
+            </a:r>
+            <a:r>
+              <a:rPr lang="en-US" sz="1400" dirty="0">
+                <a:solidFill>
+                  <a:srgbClr val="1E3063"/>
+                </a:solidFill>
+                <a:latin typeface="Instrument Sans Medium" pitchFamily="34" charset="0"/>
+                <a:ea typeface="Instrument Sans Medium" pitchFamily="34" charset="-122"/>
+                <a:cs typeface="Instrument Sans Medium" pitchFamily="34" charset="-120"/>
+              </a:rPr>
+              <a:t> ограничений.</a:t>
+            </a:r>
+            <a:endParaRPr lang="en-US" sz="1400" dirty="0"/>
+          </a:p>
+        </p:txBody>
+      </p:sp>
+      <p:sp>
+        <p:nvSpPr>
+          <p:cNvPr id="6" name="Shape 4"/>
           <p:cNvSpPr/>
           <p:nvPr/>
         </p:nvSpPr>
         <p:spPr>
           <a:xfrm>
-            <a:off x="4749701" y="1672456"/>
-            <a:ext cx="2583656" cy="265807"/>
+            <a:off x="4896669" y="776287"/>
+            <a:ext cx="3351981" cy="1795463"/>
+          </a:xfrm>
+          <a:prstGeom prst="roundRect">
+            <a:avLst>
+              <a:gd name="adj" fmla="val 11207"/>
+            </a:avLst>
+          </a:prstGeom>
+          <a:solidFill>
+            <a:srgbClr val="FFFFFF"/>
+          </a:solidFill>
+          <a:ln w="19050">
+            <a:solidFill>
+              <a:srgbClr val="B4CCE3"/>
+            </a:solidFill>
+            <a:prstDash val="solid"/>
+          </a:ln>
+        </p:spPr>
+      </p:sp>
+      <p:sp>
+        <p:nvSpPr>
+          <p:cNvPr id="7" name="Text 5"/>
+          <p:cNvSpPr/>
+          <p:nvPr/>
+        </p:nvSpPr>
+        <p:spPr>
+          <a:xfrm>
+            <a:off x="5686647" y="868275"/>
+            <a:ext cx="1772022" cy="221456"/>
           </a:xfrm>
           <a:prstGeom prst="rect">
             <a:avLst/>
@@ -5409,37 +5639,48 @@
           <a:bodyPr wrap="none" lIns="0" tIns="0" rIns="0" bIns="0" rtlCol="0" anchor="t"/>
           <a:lstStyle/>
           <a:p>
-            <a:pPr marL="0" indent="0" algn="l">
+            <a:pPr marL="0" indent="0" algn="ctr">
               <a:lnSpc>
                 <a:spcPct val="104000"/>
               </a:lnSpc>
               <a:buNone/>
             </a:pPr>
             <a:r>
-              <a:rPr lang="en-US" sz="1650" dirty="0">
-                <a:solidFill>
-                  <a:srgbClr val="091C53"/>
+              <a:rPr lang="en-US" sz="1600" b="1" dirty="0">
+                <a:solidFill>
+                  <a:srgbClr val="1E3063"/>
                 </a:solidFill>
                 <a:latin typeface="Instrument Sans SemiBold" pitchFamily="34" charset="0"/>
                 <a:ea typeface="Instrument Sans SemiBold" pitchFamily="34" charset="-122"/>
                 <a:cs typeface="Instrument Sans SemiBold" pitchFamily="34" charset="-120"/>
               </a:rPr>
-              <a:t>Функционал</a:t>
-            </a:r>
-            <a:endParaRPr lang="en-US" sz="1650" dirty="0"/>
-          </a:p>
-        </p:txBody>
-      </p:sp>
-      <p:sp>
-        <p:nvSpPr>
-          <p:cNvPr id="10" name="Text 8"/>
+              <a:t>🎯 </a:t>
+            </a:r>
+            <a:r>
+              <a:rPr lang="en-US" sz="1600" b="1" dirty="0" err="1">
+                <a:solidFill>
+                  <a:srgbClr val="1E3063"/>
+                </a:solidFill>
+                <a:latin typeface="Instrument Sans SemiBold" pitchFamily="34" charset="0"/>
+                <a:ea typeface="Instrument Sans SemiBold" pitchFamily="34" charset="-122"/>
+                <a:cs typeface="Instrument Sans SemiBold" pitchFamily="34" charset="-120"/>
+              </a:rPr>
+              <a:t>Цель</a:t>
+            </a:r>
+            <a:endParaRPr lang="en-US" sz="1600" b="1" dirty="0"/>
+          </a:p>
+        </p:txBody>
+      </p:sp>
+      <p:sp>
+        <p:nvSpPr>
+          <p:cNvPr id="8" name="Text 6"/>
           <p:cNvSpPr/>
           <p:nvPr/>
         </p:nvSpPr>
         <p:spPr>
           <a:xfrm>
-            <a:off x="4749701" y="2080022"/>
-            <a:ext cx="3902943" cy="1282750"/>
+            <a:off x="5029119" y="1262915"/>
+            <a:ext cx="3087079" cy="1025848"/>
           </a:xfrm>
           <a:prstGeom prst="rect">
             <a:avLst/>
@@ -5449,92 +5690,188 @@
         </p:spPr>
         <p:txBody>
           <a:bodyPr wrap="square" lIns="0" tIns="0" rIns="0" bIns="0" rtlCol="0" anchor="t">
-            <a:normAutofit/>
+            <a:noAutofit/>
           </a:bodyPr>
           <a:lstStyle/>
           <a:p>
-            <a:pPr marL="342900" indent="-342900" algn="l">
+            <a:pPr marL="0" indent="0" algn="l">
+              <a:lnSpc>
+                <a:spcPct val="133000"/>
+              </a:lnSpc>
+              <a:buNone/>
+            </a:pPr>
+            <a:r>
+              <a:rPr lang="en-US" sz="1400" dirty="0">
+                <a:solidFill>
+                  <a:srgbClr val="1E3063"/>
+                </a:solidFill>
+                <a:latin typeface="Instrument Sans Medium" pitchFamily="34" charset="0"/>
+                <a:ea typeface="Instrument Sans Medium" pitchFamily="34" charset="-122"/>
+                <a:cs typeface="Instrument Sans Medium" pitchFamily="34" charset="-120"/>
+              </a:rPr>
+              <a:t>Создать настольное GUI‑приложение на C++/MFC для автоматической детекции disposable email.</a:t>
+            </a:r>
+            <a:endParaRPr lang="en-US" sz="1400" dirty="0"/>
+          </a:p>
+        </p:txBody>
+      </p:sp>
+      <p:sp>
+        <p:nvSpPr>
+          <p:cNvPr id="9" name="Text 7"/>
+          <p:cNvSpPr/>
+          <p:nvPr/>
+        </p:nvSpPr>
+        <p:spPr>
+          <a:xfrm>
+            <a:off x="3796871" y="3022302"/>
+            <a:ext cx="1523690" cy="265807"/>
+          </a:xfrm>
+          <a:prstGeom prst="rect">
+            <a:avLst/>
+          </a:prstGeom>
+          <a:noFill/>
+          <a:ln/>
+        </p:spPr>
+        <p:txBody>
+          <a:bodyPr wrap="none" lIns="0" tIns="0" rIns="0" bIns="0" rtlCol="0" anchor="t"/>
+          <a:lstStyle/>
+          <a:p>
+            <a:pPr marL="0" indent="0" algn="ctr">
+              <a:lnSpc>
+                <a:spcPct val="104000"/>
+              </a:lnSpc>
+              <a:buNone/>
+            </a:pPr>
+            <a:r>
+              <a:rPr lang="en-US" sz="1600" b="1" dirty="0">
+                <a:solidFill>
+                  <a:srgbClr val="091C53"/>
+                </a:solidFill>
+                <a:latin typeface="Instrument Sans SemiBold" pitchFamily="34" charset="0"/>
+                <a:ea typeface="Instrument Sans SemiBold" pitchFamily="34" charset="-122"/>
+                <a:cs typeface="Instrument Sans SemiBold" pitchFamily="34" charset="-120"/>
+              </a:rPr>
+              <a:t>Функционал</a:t>
+            </a:r>
+            <a:endParaRPr lang="en-US" sz="1600" b="1" dirty="0"/>
+          </a:p>
+        </p:txBody>
+      </p:sp>
+      <p:sp>
+        <p:nvSpPr>
+          <p:cNvPr id="10" name="Text 8"/>
+          <p:cNvSpPr/>
+          <p:nvPr/>
+        </p:nvSpPr>
+        <p:spPr>
+          <a:xfrm>
+            <a:off x="2771930" y="3318397"/>
+            <a:ext cx="3600140" cy="1425053"/>
+          </a:xfrm>
+          <a:prstGeom prst="rect">
+            <a:avLst/>
+          </a:prstGeom>
+          <a:noFill/>
+          <a:ln/>
+        </p:spPr>
+        <p:txBody>
+          <a:bodyPr wrap="square" lIns="0" tIns="0" rIns="0" bIns="0" rtlCol="0" anchor="t">
+            <a:noAutofit/>
+          </a:bodyPr>
+          <a:lstStyle/>
+          <a:p>
+            <a:pPr marL="285750" indent="-285750">
               <a:lnSpc>
                 <a:spcPct val="133000"/>
               </a:lnSpc>
               <a:buSzPct val="100000"/>
+              <a:buFont typeface="Arial" panose="020B0604020202020204" pitchFamily="34" charset="0"/>
               <a:buChar char="•"/>
             </a:pPr>
             <a:r>
-              <a:rPr lang="en-US" sz="1100" dirty="0">
+              <a:rPr lang="en-US" sz="1400" dirty="0">
                 <a:solidFill>
                   <a:srgbClr val="1E3063"/>
                 </a:solidFill>
                 <a:latin typeface="Instrument Sans Medium" pitchFamily="34" charset="0"/>
-                <a:ea typeface="Instrument Sans Medium" pitchFamily="34" charset="-122"/>
-                <a:cs typeface="Instrument Sans Medium" pitchFamily="34" charset="-120"/>
               </a:rPr>
               <a:t> Загрузка базы temp_domains.txt</a:t>
             </a:r>
-            <a:endParaRPr lang="en-US" sz="1100" dirty="0"/>
-          </a:p>
-          <a:p>
-            <a:pPr marL="342900" indent="-342900" algn="l">
+          </a:p>
+          <a:p>
+            <a:pPr marL="285750" indent="-285750">
               <a:lnSpc>
                 <a:spcPct val="133000"/>
               </a:lnSpc>
               <a:buSzPct val="100000"/>
+              <a:buFont typeface="Arial" panose="020B0604020202020204" pitchFamily="34" charset="0"/>
               <a:buChar char="•"/>
             </a:pPr>
             <a:r>
-              <a:rPr lang="en-US" sz="1100" dirty="0">
+              <a:rPr lang="en-US" sz="1400" dirty="0">
                 <a:solidFill>
                   <a:srgbClr val="1E3063"/>
                 </a:solidFill>
                 <a:latin typeface="Instrument Sans Medium" pitchFamily="34" charset="0"/>
-                <a:ea typeface="Instrument Sans Medium" pitchFamily="34" charset="-122"/>
-                <a:cs typeface="Instrument Sans Medium" pitchFamily="34" charset="-120"/>
-              </a:rPr>
-              <a:t> Валидация формата email</a:t>
-            </a:r>
-            <a:endParaRPr lang="en-US" sz="1100" dirty="0"/>
-          </a:p>
-          <a:p>
-            <a:pPr marL="342900" indent="-342900" algn="l">
+              </a:rPr>
+              <a:t> Валидация </a:t>
+            </a:r>
+            <a:r>
+              <a:rPr lang="en-US" sz="1400" dirty="0" err="1">
+                <a:solidFill>
+                  <a:srgbClr val="1E3063"/>
+                </a:solidFill>
+                <a:latin typeface="Instrument Sans Medium" pitchFamily="34" charset="0"/>
+              </a:rPr>
+              <a:t>формата</a:t>
+            </a:r>
+            <a:r>
+              <a:rPr lang="en-US" sz="1400" dirty="0">
+                <a:solidFill>
+                  <a:srgbClr val="1E3063"/>
+                </a:solidFill>
+                <a:latin typeface="Instrument Sans Medium" pitchFamily="34" charset="0"/>
+              </a:rPr>
+              <a:t> email</a:t>
+            </a:r>
+          </a:p>
+          <a:p>
+            <a:pPr marL="285750" indent="-285750">
               <a:lnSpc>
                 <a:spcPct val="133000"/>
               </a:lnSpc>
               <a:buSzPct val="100000"/>
+              <a:buFont typeface="Arial" panose="020B0604020202020204" pitchFamily="34" charset="0"/>
               <a:buChar char="•"/>
             </a:pPr>
             <a:r>
-              <a:rPr lang="en-US" sz="1100" dirty="0">
+              <a:rPr lang="en-US" sz="1400" dirty="0">
                 <a:solidFill>
                   <a:srgbClr val="1E3063"/>
                 </a:solidFill>
                 <a:latin typeface="Instrument Sans Medium" pitchFamily="34" charset="0"/>
-                <a:ea typeface="Instrument Sans Medium" pitchFamily="34" charset="-122"/>
-                <a:cs typeface="Instrument Sans Medium" pitchFamily="34" charset="-120"/>
               </a:rPr>
               <a:t> Одиночная проверка и пакетная обработка (.txt, .csv)</a:t>
             </a:r>
-            <a:endParaRPr lang="en-US" sz="1100" dirty="0"/>
-          </a:p>
-          <a:p>
-            <a:pPr marL="342900" indent="-342900" algn="l">
+          </a:p>
+          <a:p>
+            <a:pPr marL="285750" indent="-285750">
               <a:lnSpc>
                 <a:spcPct val="133000"/>
               </a:lnSpc>
               <a:buSzPct val="100000"/>
+              <a:buFont typeface="Arial" panose="020B0604020202020204" pitchFamily="34" charset="0"/>
               <a:buChar char="•"/>
             </a:pPr>
             <a:r>
-              <a:rPr lang="en-US" sz="1100" dirty="0">
+              <a:rPr lang="en-US" sz="1400" dirty="0">
                 <a:solidFill>
                   <a:srgbClr val="1E3063"/>
                 </a:solidFill>
                 <a:latin typeface="Instrument Sans Medium" pitchFamily="34" charset="0"/>
-                <a:ea typeface="Instrument Sans Medium" pitchFamily="34" charset="-122"/>
-                <a:cs typeface="Instrument Sans Medium" pitchFamily="34" charset="-120"/>
               </a:rPr>
               <a:t> Экспорт отчёта в UTF‑8 с BOM</a:t>
             </a:r>
-            <a:endParaRPr lang="en-US" sz="1100" dirty="0"/>
           </a:p>
         </p:txBody>
       </p:sp>
@@ -5565,14 +5902,14 @@
       </p:grpSpPr>
       <p:sp>
         <p:nvSpPr>
-          <p:cNvPr id="2" name="Text 0"/>
+          <p:cNvPr id="3" name="Text 1"/>
           <p:cNvSpPr/>
           <p:nvPr/>
         </p:nvSpPr>
         <p:spPr>
           <a:xfrm>
-            <a:off x="1209452" y="310455"/>
-            <a:ext cx="4129906" cy="304502"/>
+            <a:off x="1034839" y="653515"/>
+            <a:ext cx="7324948" cy="417455"/>
           </a:xfrm>
           <a:prstGeom prst="rect">
             <a:avLst/>
@@ -5584,56 +5921,14 @@
           <a:bodyPr wrap="none" lIns="0" tIns="0" rIns="0" bIns="0" rtlCol="0" anchor="t"/>
           <a:lstStyle/>
           <a:p>
-            <a:pPr marL="0" indent="0" algn="l">
-              <a:lnSpc>
-                <a:spcPct val="104000"/>
-              </a:lnSpc>
-              <a:buNone/>
-            </a:pPr>
-            <a:r>
-              <a:rPr lang="en-US" sz="1900" dirty="0">
-                <a:solidFill>
-                  <a:srgbClr val="091C53"/>
-                </a:solidFill>
-                <a:latin typeface="Instrument Sans SemiBold" pitchFamily="34" charset="0"/>
-                <a:ea typeface="Instrument Sans SemiBold" pitchFamily="34" charset="-122"/>
-                <a:cs typeface="Instrument Sans SemiBold" pitchFamily="34" charset="-120"/>
-              </a:rPr>
-              <a:t>Стек технологий и архитектура</a:t>
-            </a:r>
-            <a:endParaRPr lang="en-US" sz="1900" dirty="0"/>
-          </a:p>
-        </p:txBody>
-      </p:sp>
-      <p:sp>
-        <p:nvSpPr>
-          <p:cNvPr id="3" name="Text 1"/>
-          <p:cNvSpPr/>
-          <p:nvPr/>
-        </p:nvSpPr>
-        <p:spPr>
-          <a:xfrm>
-            <a:off x="1209452" y="748903"/>
-            <a:ext cx="7182222" cy="131564"/>
-          </a:xfrm>
-          <a:prstGeom prst="rect">
-            <a:avLst/>
-          </a:prstGeom>
-          <a:noFill/>
-          <a:ln/>
-        </p:spPr>
-        <p:txBody>
-          <a:bodyPr wrap="none" lIns="0" tIns="0" rIns="0" bIns="0" rtlCol="0" anchor="t"/>
-          <a:lstStyle/>
-          <a:p>
-            <a:pPr marL="0" indent="0" algn="l">
+            <a:pPr marL="0" indent="0" algn="ctr">
               <a:lnSpc>
                 <a:spcPct val="113000"/>
               </a:lnSpc>
               <a:buNone/>
             </a:pPr>
             <a:r>
-              <a:rPr lang="en-US" sz="750" dirty="0">
+              <a:rPr lang="en-US" sz="1200" dirty="0">
                 <a:solidFill>
                   <a:srgbClr val="1E3063"/>
                 </a:solidFill>
@@ -5643,7 +5938,7 @@
               </a:rPr>
               <a:t>Ключевые методы: LoadDomainDatabase(), IsValidEmail(), IsDisposable(), SaveReport()</a:t>
             </a:r>
-            <a:endParaRPr lang="en-US" sz="750" dirty="0"/>
+            <a:endParaRPr lang="en-US" sz="1200" dirty="0"/>
           </a:p>
         </p:txBody>
       </p:sp>
@@ -5669,7 +5964,7 @@
         </p:blipFill>
         <p:spPr>
           <a:xfrm>
-            <a:off x="1209452" y="955849"/>
+            <a:off x="2112758" y="918721"/>
             <a:ext cx="243632" cy="243632"/>
           </a:xfrm>
           <a:prstGeom prst="rect">
@@ -5685,7 +5980,7 @@
         </p:nvSpPr>
         <p:spPr>
           <a:xfrm>
-            <a:off x="1209452" y="1283196"/>
+            <a:off x="1611281" y="1195886"/>
             <a:ext cx="1218307" cy="152251"/>
           </a:xfrm>
           <a:prstGeom prst="rect">
@@ -5698,7 +5993,7 @@
           <a:bodyPr wrap="none" lIns="0" tIns="0" rIns="0" bIns="0" rtlCol="0" anchor="t"/>
           <a:lstStyle/>
           <a:p>
-            <a:pPr marL="0" indent="0" algn="l">
+            <a:pPr marL="0" indent="0" algn="ctr">
               <a:lnSpc>
                 <a:spcPct val="104000"/>
               </a:lnSpc>
@@ -5713,9 +6008,20 @@
                 <a:ea typeface="Instrument Sans SemiBold" pitchFamily="34" charset="-122"/>
                 <a:cs typeface="Instrument Sans SemiBold" pitchFamily="34" charset="-120"/>
               </a:rPr>
-              <a:t>C++17</a:t>
-            </a:r>
-            <a:endParaRPr lang="en-US" sz="950" dirty="0"/>
+              <a:t>C++</a:t>
+            </a:r>
+            <a:r>
+              <a:rPr lang="en-US" sz="1000" dirty="0">
+                <a:solidFill>
+                  <a:srgbClr val="1E3063"/>
+                </a:solidFill>
+                <a:latin typeface="Instrument Sans SemiBold" pitchFamily="34" charset="0"/>
+                <a:ea typeface="Instrument Sans SemiBold" pitchFamily="34" charset="-122"/>
+                <a:cs typeface="Instrument Sans SemiBold" pitchFamily="34" charset="-120"/>
+              </a:rPr>
+              <a:t>17</a:t>
+            </a:r>
+            <a:endParaRPr lang="en-US" sz="1000" dirty="0"/>
           </a:p>
         </p:txBody>
       </p:sp>
@@ -5727,8 +6033,8 @@
         </p:nvSpPr>
         <p:spPr>
           <a:xfrm>
-            <a:off x="1209452" y="1475631"/>
-            <a:ext cx="2185839" cy="131564"/>
+            <a:off x="1438736" y="1373330"/>
+            <a:ext cx="1563396" cy="664141"/>
           </a:xfrm>
           <a:prstGeom prst="rect">
             <a:avLst/>
@@ -5740,14 +6046,14 @@
           <a:bodyPr wrap="none" lIns="0" tIns="0" rIns="0" bIns="0" rtlCol="0" anchor="t"/>
           <a:lstStyle/>
           <a:p>
-            <a:pPr marL="0" indent="0" algn="l">
+            <a:pPr marL="0" indent="0" algn="ctr">
               <a:lnSpc>
                 <a:spcPct val="113000"/>
               </a:lnSpc>
               <a:buNone/>
             </a:pPr>
             <a:r>
-              <a:rPr lang="en-US" sz="750" dirty="0">
+              <a:rPr lang="ru-RU" sz="1000" dirty="0">
                 <a:solidFill>
                   <a:srgbClr val="1E3063"/>
                 </a:solidFill>
@@ -5755,9 +6061,27 @@
                 <a:ea typeface="Instrument Sans Medium" pitchFamily="34" charset="-122"/>
                 <a:cs typeface="Instrument Sans Medium" pitchFamily="34" charset="-120"/>
               </a:rPr>
-              <a:t>Производительность, статическая линковка</a:t>
-            </a:r>
-            <a:endParaRPr lang="en-US" sz="750" dirty="0"/>
+              <a:t>Производительность, </a:t>
+            </a:r>
+          </a:p>
+          <a:p>
+            <a:pPr marL="0" indent="0" algn="ctr">
+              <a:lnSpc>
+                <a:spcPct val="113000"/>
+              </a:lnSpc>
+              <a:buNone/>
+            </a:pPr>
+            <a:r>
+              <a:rPr lang="ru-RU" sz="1000" dirty="0">
+                <a:solidFill>
+                  <a:srgbClr val="1E3063"/>
+                </a:solidFill>
+                <a:latin typeface="Instrument Sans Medium" pitchFamily="34" charset="0"/>
+                <a:ea typeface="Instrument Sans Medium" pitchFamily="34" charset="-122"/>
+                <a:cs typeface="Instrument Sans Medium" pitchFamily="34" charset="-120"/>
+              </a:rPr>
+              <a:t>статическая линковка</a:t>
+            </a:r>
           </a:p>
         </p:txBody>
       </p:sp>
@@ -5783,7 +6107,7 @@
         </p:blipFill>
         <p:spPr>
           <a:xfrm>
-            <a:off x="3479006" y="955849"/>
+            <a:off x="4382312" y="918721"/>
             <a:ext cx="243632" cy="243632"/>
           </a:xfrm>
           <a:prstGeom prst="rect">
@@ -5799,7 +6123,7 @@
         </p:nvSpPr>
         <p:spPr>
           <a:xfrm>
-            <a:off x="3479006" y="1283196"/>
+            <a:off x="3894974" y="1195885"/>
             <a:ext cx="1218307" cy="152251"/>
           </a:xfrm>
           <a:prstGeom prst="rect">
@@ -5812,14 +6136,14 @@
           <a:bodyPr wrap="none" lIns="0" tIns="0" rIns="0" bIns="0" rtlCol="0" anchor="t"/>
           <a:lstStyle/>
           <a:p>
-            <a:pPr marL="0" indent="0" algn="l">
+            <a:pPr marL="0" indent="0" algn="ctr">
               <a:lnSpc>
                 <a:spcPct val="104000"/>
               </a:lnSpc>
               <a:buNone/>
             </a:pPr>
             <a:r>
-              <a:rPr lang="en-US" sz="950" dirty="0">
+              <a:rPr lang="en-US" sz="1000" dirty="0">
                 <a:solidFill>
                   <a:srgbClr val="1E3063"/>
                 </a:solidFill>
@@ -5829,7 +6153,7 @@
               </a:rPr>
               <a:t>MFC</a:t>
             </a:r>
-            <a:endParaRPr lang="en-US" sz="950" dirty="0"/>
+            <a:endParaRPr lang="en-US" sz="1000" dirty="0"/>
           </a:p>
         </p:txBody>
       </p:sp>
@@ -5841,8 +6165,8 @@
         </p:nvSpPr>
         <p:spPr>
           <a:xfrm>
-            <a:off x="3479006" y="1475631"/>
-            <a:ext cx="2185839" cy="263128"/>
+            <a:off x="3368679" y="1370271"/>
+            <a:ext cx="2270895" cy="359422"/>
           </a:xfrm>
           <a:prstGeom prst="rect">
             <a:avLst/>
@@ -5852,18 +6176,18 @@
         </p:spPr>
         <p:txBody>
           <a:bodyPr wrap="square" lIns="0" tIns="0" rIns="0" bIns="0" rtlCol="0" anchor="t">
-            <a:normAutofit/>
+            <a:noAutofit/>
           </a:bodyPr>
           <a:lstStyle/>
           <a:p>
-            <a:pPr marL="0" indent="0" algn="l">
+            <a:pPr marL="0" indent="0" algn="ctr">
               <a:lnSpc>
                 <a:spcPct val="113000"/>
               </a:lnSpc>
               <a:buNone/>
             </a:pPr>
             <a:r>
-              <a:rPr lang="en-US" sz="750" dirty="0">
+              <a:rPr lang="en-US" sz="1000" dirty="0">
                 <a:solidFill>
                   <a:srgbClr val="1E3063"/>
                 </a:solidFill>
@@ -5873,7 +6197,7 @@
               </a:rPr>
               <a:t>Диалоговое приложение, элементы CEdit / CListCtrl</a:t>
             </a:r>
-            <a:endParaRPr lang="en-US" sz="750" dirty="0"/>
+            <a:endParaRPr lang="en-US" sz="1000" dirty="0"/>
           </a:p>
         </p:txBody>
       </p:sp>
@@ -5899,7 +6223,7 @@
         </p:blipFill>
         <p:spPr>
           <a:xfrm>
-            <a:off x="5748561" y="955849"/>
+            <a:off x="6651867" y="918721"/>
             <a:ext cx="243632" cy="243632"/>
           </a:xfrm>
           <a:prstGeom prst="rect">
@@ -5915,7 +6239,7 @@
         </p:nvSpPr>
         <p:spPr>
           <a:xfrm>
-            <a:off x="5748561" y="1283196"/>
+            <a:off x="6164529" y="1200015"/>
             <a:ext cx="1218307" cy="152251"/>
           </a:xfrm>
           <a:prstGeom prst="rect">
@@ -5928,14 +6252,14 @@
           <a:bodyPr wrap="none" lIns="0" tIns="0" rIns="0" bIns="0" rtlCol="0" anchor="t"/>
           <a:lstStyle/>
           <a:p>
-            <a:pPr marL="0" indent="0" algn="l">
+            <a:pPr marL="0" indent="0" algn="ctr">
               <a:lnSpc>
                 <a:spcPct val="104000"/>
               </a:lnSpc>
               <a:buNone/>
             </a:pPr>
             <a:r>
-              <a:rPr lang="en-US" sz="950" dirty="0">
+              <a:rPr lang="en-US" sz="1000" dirty="0">
                 <a:solidFill>
                   <a:srgbClr val="1E3063"/>
                 </a:solidFill>
@@ -5945,7 +6269,7 @@
               </a:rPr>
               <a:t>unordered_set</a:t>
             </a:r>
-            <a:endParaRPr lang="en-US" sz="950" dirty="0"/>
+            <a:endParaRPr lang="en-US" sz="1000" dirty="0"/>
           </a:p>
         </p:txBody>
       </p:sp>
@@ -5957,8 +6281,8 @@
         </p:nvSpPr>
         <p:spPr>
           <a:xfrm>
-            <a:off x="5748561" y="1475631"/>
-            <a:ext cx="2185839" cy="131564"/>
+            <a:off x="5768906" y="1373330"/>
+            <a:ext cx="2009552" cy="359422"/>
           </a:xfrm>
           <a:prstGeom prst="rect">
             <a:avLst/>
@@ -5970,14 +6294,14 @@
           <a:bodyPr wrap="none" lIns="0" tIns="0" rIns="0" bIns="0" rtlCol="0" anchor="t"/>
           <a:lstStyle/>
           <a:p>
-            <a:pPr marL="0" indent="0" algn="l">
+            <a:pPr marL="0" indent="0" algn="ctr">
               <a:lnSpc>
                 <a:spcPct val="113000"/>
               </a:lnSpc>
               <a:buNone/>
             </a:pPr>
             <a:r>
-              <a:rPr lang="en-US" sz="750" dirty="0">
+              <a:rPr lang="en-US" sz="1000" dirty="0">
                 <a:solidFill>
                   <a:srgbClr val="1E3063"/>
                 </a:solidFill>
@@ -5985,9 +6309,47 @@
                 <a:ea typeface="Instrument Sans Medium" pitchFamily="34" charset="-122"/>
                 <a:cs typeface="Instrument Sans Medium" pitchFamily="34" charset="-120"/>
               </a:rPr>
-              <a:t>Поиск домена: амортизированное O(1)</a:t>
-            </a:r>
-            <a:endParaRPr lang="en-US" sz="750" dirty="0"/>
+              <a:t>Поиск домена: </a:t>
+            </a:r>
+            <a:endParaRPr lang="ru-RU" sz="1000" dirty="0">
+              <a:solidFill>
+                <a:srgbClr val="1E3063"/>
+              </a:solidFill>
+              <a:latin typeface="Instrument Sans Medium" pitchFamily="34" charset="0"/>
+              <a:ea typeface="Instrument Sans Medium" pitchFamily="34" charset="-122"/>
+              <a:cs typeface="Instrument Sans Medium" pitchFamily="34" charset="-120"/>
+            </a:endParaRPr>
+          </a:p>
+          <a:p>
+            <a:pPr marL="0" indent="0" algn="ctr">
+              <a:lnSpc>
+                <a:spcPct val="113000"/>
+              </a:lnSpc>
+              <a:buNone/>
+            </a:pPr>
+            <a:r>
+              <a:rPr lang="en-US" sz="1000" dirty="0" err="1">
+                <a:solidFill>
+                  <a:srgbClr val="1E3063"/>
+                </a:solidFill>
+                <a:latin typeface="Instrument Sans Medium" pitchFamily="34" charset="0"/>
+                <a:ea typeface="Instrument Sans Medium" pitchFamily="34" charset="-122"/>
+                <a:cs typeface="Instrument Sans Medium" pitchFamily="34" charset="-120"/>
+              </a:rPr>
+              <a:t>амортизированное</a:t>
+            </a:r>
+            <a:r>
+              <a:rPr lang="en-US" sz="1000" dirty="0">
+                <a:solidFill>
+                  <a:srgbClr val="1E3063"/>
+                </a:solidFill>
+                <a:latin typeface="Instrument Sans Medium" pitchFamily="34" charset="0"/>
+                <a:ea typeface="Instrument Sans Medium" pitchFamily="34" charset="-122"/>
+                <a:cs typeface="Instrument Sans Medium" pitchFamily="34" charset="-120"/>
+              </a:rPr>
+              <a:t> O(1)</a:t>
+            </a:r>
+            <a:endParaRPr lang="en-US" sz="1000" dirty="0"/>
           </a:p>
         </p:txBody>
       </p:sp>
@@ -6049,7 +6411,7 @@
         </p:blipFill>
         <p:spPr>
           <a:xfrm>
-            <a:off x="1317129" y="2183383"/>
+            <a:off x="1317129" y="2170844"/>
             <a:ext cx="6509593" cy="2442642"/>
           </a:xfrm>
           <a:prstGeom prst="rect">
@@ -6279,8 +6641,8 @@
         </p:nvSpPr>
         <p:spPr>
           <a:xfrm>
-            <a:off x="1209452" y="4701406"/>
-            <a:ext cx="7182222" cy="131564"/>
+            <a:off x="980889" y="4554922"/>
+            <a:ext cx="7182222" cy="194444"/>
           </a:xfrm>
           <a:prstGeom prst="rect">
             <a:avLst/>
@@ -6292,14 +6654,14 @@
           <a:bodyPr wrap="none" lIns="0" tIns="0" rIns="0" bIns="0" rtlCol="0" anchor="t"/>
           <a:lstStyle/>
           <a:p>
-            <a:pPr marL="0" indent="0" algn="l">
+            <a:pPr marL="0" indent="0" algn="ctr">
               <a:lnSpc>
                 <a:spcPct val="113000"/>
               </a:lnSpc>
               <a:buNone/>
             </a:pPr>
             <a:r>
-              <a:rPr lang="en-US" sz="750" dirty="0">
+              <a:rPr lang="en-US" sz="1000" dirty="0">
                 <a:solidFill>
                   <a:srgbClr val="1E3063"/>
                 </a:solidFill>
@@ -6309,7 +6671,54 @@
               </a:rPr>
               <a:t>Диалог‑базированное приложение, главный класс CTempMailCheckerDlg (CDialogEx).</a:t>
             </a:r>
-            <a:endParaRPr lang="en-US" sz="750" dirty="0"/>
+            <a:endParaRPr lang="en-US" sz="1000" dirty="0"/>
+          </a:p>
+        </p:txBody>
+      </p:sp>
+      <p:sp>
+        <p:nvSpPr>
+          <p:cNvPr id="2" name="Text 0">
+            <a:extLst>
+              <a:ext uri="{FF2B5EF4-FFF2-40B4-BE49-F238E27FC236}">
+                <a16:creationId xmlns:a16="http://schemas.microsoft.com/office/drawing/2014/main" id="{7EE0B5CB-0772-FA75-AD9F-6B512870D4E0}"/>
+              </a:ext>
+            </a:extLst>
+          </p:cNvPr>
+          <p:cNvSpPr/>
+          <p:nvPr/>
+        </p:nvSpPr>
+        <p:spPr>
+          <a:xfrm>
+            <a:off x="0" y="2969"/>
+            <a:ext cx="9144000" cy="687065"/>
+          </a:xfrm>
+          <a:prstGeom prst="rect">
+            <a:avLst/>
+          </a:prstGeom>
+          <a:noFill/>
+          <a:ln/>
+        </p:spPr>
+        <p:txBody>
+          <a:bodyPr wrap="none" lIns="0" tIns="0" rIns="0" bIns="0" rtlCol="0" anchor="t"/>
+          <a:lstStyle/>
+          <a:p>
+            <a:pPr marL="0" indent="0" algn="ctr">
+              <a:lnSpc>
+                <a:spcPct val="104000"/>
+              </a:lnSpc>
+              <a:buNone/>
+            </a:pPr>
+            <a:r>
+              <a:rPr lang="ru-RU" sz="2800" dirty="0">
+                <a:solidFill>
+                  <a:srgbClr val="091C53"/>
+                </a:solidFill>
+                <a:latin typeface="Instrument Sans SemiBold" pitchFamily="34" charset="0"/>
+                <a:ea typeface="Instrument Sans SemiBold" pitchFamily="34" charset="-122"/>
+                <a:cs typeface="Instrument Sans SemiBold" pitchFamily="34" charset="-120"/>
+              </a:rPr>
+              <a:t>Стек технологий и архитектура</a:t>
+            </a:r>
           </a:p>
         </p:txBody>
       </p:sp>
@@ -6322,6 +6731,310 @@
 </file>
 
 <file path=ppt/slides/slide4.xml><?xml version="1.0" encoding="utf-8"?>
+<p:sld xmlns:a="http://schemas.openxmlformats.org/drawingml/2006/main" xmlns:r="http://schemas.openxmlformats.org/officeDocument/2006/relationships" xmlns:p="http://schemas.openxmlformats.org/presentationml/2006/main">
+  <p:cSld>
+    <p:spTree>
+      <p:nvGrpSpPr>
+        <p:cNvPr id="1" name=""/>
+        <p:cNvGrpSpPr/>
+        <p:nvPr/>
+      </p:nvGrpSpPr>
+      <p:grpSpPr>
+        <a:xfrm>
+          <a:off x="0" y="0"/>
+          <a:ext cx="0" cy="0"/>
+          <a:chOff x="0" y="0"/>
+          <a:chExt cx="0" cy="0"/>
+        </a:xfrm>
+      </p:grpSpPr>
+      <p:sp>
+        <p:nvSpPr>
+          <p:cNvPr id="3" name="Text 0">
+            <a:extLst>
+              <a:ext uri="{FF2B5EF4-FFF2-40B4-BE49-F238E27FC236}">
+                <a16:creationId xmlns:a16="http://schemas.microsoft.com/office/drawing/2014/main" id="{CDD29ED9-DF81-2056-D26D-BFECE5D413D8}"/>
+              </a:ext>
+            </a:extLst>
+          </p:cNvPr>
+          <p:cNvSpPr/>
+          <p:nvPr/>
+        </p:nvSpPr>
+        <p:spPr>
+          <a:xfrm>
+            <a:off x="0" y="2969"/>
+            <a:ext cx="9144000" cy="687065"/>
+          </a:xfrm>
+          <a:prstGeom prst="rect">
+            <a:avLst/>
+          </a:prstGeom>
+          <a:noFill/>
+          <a:ln/>
+        </p:spPr>
+        <p:txBody>
+          <a:bodyPr wrap="none" lIns="0" tIns="0" rIns="0" bIns="0" rtlCol="0" anchor="t"/>
+          <a:lstStyle/>
+          <a:p>
+            <a:pPr marL="0" indent="0" algn="ctr">
+              <a:lnSpc>
+                <a:spcPct val="104000"/>
+              </a:lnSpc>
+              <a:buNone/>
+            </a:pPr>
+            <a:r>
+              <a:rPr lang="ru-RU" sz="2800" dirty="0">
+                <a:solidFill>
+                  <a:srgbClr val="091C53"/>
+                </a:solidFill>
+                <a:latin typeface="Instrument Sans SemiBold" pitchFamily="34" charset="0"/>
+                <a:ea typeface="Instrument Sans SemiBold" pitchFamily="34" charset="-122"/>
+                <a:cs typeface="Instrument Sans SemiBold" pitchFamily="34" charset="-120"/>
+              </a:rPr>
+              <a:t>Структура окна </a:t>
+            </a:r>
+          </a:p>
+        </p:txBody>
+      </p:sp>
+      <p:pic>
+        <p:nvPicPr>
+          <p:cNvPr id="1026" name="Picture 2">
+            <a:extLst>
+              <a:ext uri="{FF2B5EF4-FFF2-40B4-BE49-F238E27FC236}">
+                <a16:creationId xmlns:a16="http://schemas.microsoft.com/office/drawing/2014/main" id="{AED4ABF1-7968-5295-53DA-4FF2ACBB9BD2}"/>
+              </a:ext>
+            </a:extLst>
+          </p:cNvPr>
+          <p:cNvPicPr>
+            <a:picLocks noChangeAspect="1" noChangeArrowheads="1"/>
+          </p:cNvPicPr>
+          <p:nvPr/>
+        </p:nvPicPr>
+        <p:blipFill>
+          <a:blip r:embed="rId2">
+            <a:extLst>
+              <a:ext uri="{28A0092B-C50C-407E-A947-70E740481C1C}">
+                <a14:useLocalDpi xmlns:a14="http://schemas.microsoft.com/office/drawing/2010/main" val="0"/>
+              </a:ext>
+            </a:extLst>
+          </a:blip>
+          <a:srcRect/>
+          <a:stretch>
+            <a:fillRect/>
+          </a:stretch>
+        </p:blipFill>
+        <p:spPr bwMode="auto">
+          <a:xfrm>
+            <a:off x="550863" y="690034"/>
+            <a:ext cx="5227637" cy="3670300"/>
+          </a:xfrm>
+          <a:prstGeom prst="rect">
+            <a:avLst/>
+          </a:prstGeom>
+          <a:noFill/>
+          <a:ln>
+            <a:noFill/>
+          </a:ln>
+          <a:extLst>
+            <a:ext uri="{909E8E84-426E-40DD-AFC4-6F175D3DCCD1}">
+              <a14:hiddenFill xmlns:a14="http://schemas.microsoft.com/office/drawing/2010/main">
+                <a:solidFill>
+                  <a:srgbClr val="FFFFFF"/>
+                </a:solidFill>
+              </a14:hiddenFill>
+            </a:ext>
+            <a:ext uri="{91240B29-F687-4F45-9708-019B960494DF}">
+              <a14:hiddenLine xmlns:a14="http://schemas.microsoft.com/office/drawing/2010/main" w="9525">
+                <a:solidFill>
+                  <a:srgbClr val="000000"/>
+                </a:solidFill>
+                <a:miter lim="800000"/>
+                <a:headEnd/>
+                <a:tailEnd/>
+              </a14:hiddenLine>
+            </a:ext>
+          </a:extLst>
+        </p:spPr>
+      </p:pic>
+      <p:sp>
+        <p:nvSpPr>
+          <p:cNvPr id="4" name="TextBox 3">
+            <a:extLst>
+              <a:ext uri="{FF2B5EF4-FFF2-40B4-BE49-F238E27FC236}">
+                <a16:creationId xmlns:a16="http://schemas.microsoft.com/office/drawing/2014/main" id="{3A25E5F2-3D4C-1DA0-5B09-CC354E75669D}"/>
+              </a:ext>
+            </a:extLst>
+          </p:cNvPr>
+          <p:cNvSpPr txBox="1"/>
+          <p:nvPr/>
+        </p:nvSpPr>
+        <p:spPr>
+          <a:xfrm>
+            <a:off x="6010275" y="690034"/>
+            <a:ext cx="2901950" cy="4339650"/>
+          </a:xfrm>
+          <a:prstGeom prst="rect">
+            <a:avLst/>
+          </a:prstGeom>
+          <a:noFill/>
+        </p:spPr>
+        <p:txBody>
+          <a:bodyPr wrap="square" rtlCol="0">
+            <a:spAutoFit/>
+          </a:bodyPr>
+          <a:lstStyle/>
+          <a:p>
+            <a:pPr marL="342900" marR="107950" lvl="0" indent="-342900">
+              <a:lnSpc>
+                <a:spcPct val="150000"/>
+              </a:lnSpc>
+              <a:buFont typeface="+mj-lt"/>
+              <a:buAutoNum type="arabicParenR"/>
+            </a:pPr>
+            <a:r>
+              <a:rPr lang="ru-RU" sz="1400" dirty="0">
+                <a:solidFill>
+                  <a:srgbClr val="091C53"/>
+                </a:solidFill>
+              </a:rPr>
+              <a:t>Поле ввода текста для проверки</a:t>
+            </a:r>
+          </a:p>
+          <a:p>
+            <a:pPr marL="342900" marR="107950" lvl="0" indent="-342900">
+              <a:lnSpc>
+                <a:spcPct val="150000"/>
+              </a:lnSpc>
+              <a:buFont typeface="+mj-lt"/>
+              <a:buAutoNum type="arabicParenR"/>
+            </a:pPr>
+            <a:r>
+              <a:rPr lang="ru-RU" sz="1400" dirty="0">
+                <a:solidFill>
+                  <a:srgbClr val="091C53"/>
+                </a:solidFill>
+              </a:rPr>
+              <a:t>Кнопка проверки введённого текста</a:t>
+            </a:r>
+          </a:p>
+          <a:p>
+            <a:pPr marL="342900" marR="107950" lvl="0" indent="-342900">
+              <a:lnSpc>
+                <a:spcPct val="150000"/>
+              </a:lnSpc>
+              <a:buFont typeface="+mj-lt"/>
+              <a:buAutoNum type="arabicParenR"/>
+            </a:pPr>
+            <a:r>
+              <a:rPr lang="ru-RU" sz="1400" dirty="0">
+                <a:solidFill>
+                  <a:srgbClr val="091C53"/>
+                </a:solidFill>
+              </a:rPr>
+              <a:t>Кнопка загрузки файла с листом данных для проверки</a:t>
+            </a:r>
+          </a:p>
+          <a:p>
+            <a:pPr marL="342900" marR="107950" lvl="0" indent="-342900">
+              <a:lnSpc>
+                <a:spcPct val="150000"/>
+              </a:lnSpc>
+              <a:buFont typeface="+mj-lt"/>
+              <a:buAutoNum type="arabicParenR"/>
+            </a:pPr>
+            <a:r>
+              <a:rPr lang="ru-RU" sz="1400" dirty="0">
+                <a:solidFill>
+                  <a:srgbClr val="091C53"/>
+                </a:solidFill>
+              </a:rPr>
+              <a:t>Окно вывода информации</a:t>
+            </a:r>
+          </a:p>
+          <a:p>
+            <a:pPr marL="342900" marR="107950" lvl="0" indent="-342900">
+              <a:lnSpc>
+                <a:spcPct val="150000"/>
+              </a:lnSpc>
+              <a:buFont typeface="+mj-lt"/>
+              <a:buAutoNum type="arabicParenR"/>
+            </a:pPr>
+            <a:r>
+              <a:rPr lang="ru-RU" sz="1400" dirty="0">
+                <a:solidFill>
+                  <a:srgbClr val="091C53"/>
+                </a:solidFill>
+              </a:rPr>
+              <a:t>Кнопка сохранения вывода в виде </a:t>
+            </a:r>
+            <a:r>
+              <a:rPr lang="en-US" sz="1400" dirty="0">
+                <a:solidFill>
+                  <a:srgbClr val="091C53"/>
+                </a:solidFill>
+              </a:rPr>
+              <a:t>txt </a:t>
+            </a:r>
+            <a:r>
+              <a:rPr lang="ru-RU" sz="1400" dirty="0">
+                <a:solidFill>
+                  <a:srgbClr val="091C53"/>
+                </a:solidFill>
+              </a:rPr>
+              <a:t>файла</a:t>
+            </a:r>
+          </a:p>
+          <a:p>
+            <a:pPr marL="342900" marR="107950" lvl="0" indent="-342900">
+              <a:lnSpc>
+                <a:spcPct val="150000"/>
+              </a:lnSpc>
+              <a:buFont typeface="+mj-lt"/>
+              <a:buAutoNum type="arabicParenR"/>
+            </a:pPr>
+            <a:r>
+              <a:rPr lang="ru-RU" sz="1400" dirty="0">
+                <a:solidFill>
+                  <a:srgbClr val="091C53"/>
+                </a:solidFill>
+              </a:rPr>
+              <a:t>Кнопка очистки в окне вывода</a:t>
+            </a:r>
+          </a:p>
+          <a:p>
+            <a:pPr marL="342900" marR="107950" lvl="0" indent="-342900">
+              <a:lnSpc>
+                <a:spcPct val="150000"/>
+              </a:lnSpc>
+              <a:buFont typeface="+mj-lt"/>
+              <a:buAutoNum type="arabicParenR"/>
+            </a:pPr>
+            <a:r>
+              <a:rPr lang="ru-RU" sz="1400" dirty="0">
+                <a:solidFill>
+                  <a:srgbClr val="091C53"/>
+                </a:solidFill>
+              </a:rPr>
+              <a:t>Окно статуса</a:t>
+            </a:r>
+          </a:p>
+          <a:p>
+            <a:endParaRPr lang="ru-RU" dirty="0"/>
+          </a:p>
+        </p:txBody>
+      </p:sp>
+    </p:spTree>
+    <p:extLst>
+      <p:ext uri="{BB962C8B-B14F-4D97-AF65-F5344CB8AC3E}">
+        <p14:creationId xmlns:p14="http://schemas.microsoft.com/office/powerpoint/2010/main" val="4070155641"/>
+      </p:ext>
+    </p:extLst>
+  </p:cSld>
+  <p:clrMapOvr>
+    <a:masterClrMapping/>
+  </p:clrMapOvr>
+</p:sld>
+</file>
+
+<file path=ppt/slides/slide5.xml><?xml version="1.0" encoding="utf-8"?>
 <p:sld xmlns:a="http://schemas.openxmlformats.org/drawingml/2006/main" xmlns:r="http://schemas.openxmlformats.org/officeDocument/2006/relationships" xmlns:p="http://schemas.openxmlformats.org/presentationml/2006/main">
   <p:cSld name="Slide 4">
     <p:spTree>
@@ -6338,48 +7051,36 @@
           <a:chExt cx="0" cy="0"/>
         </a:xfrm>
       </p:grpSpPr>
-      <p:sp>
-        <p:nvSpPr>
-          <p:cNvPr id="2" name="Text 0"/>
-          <p:cNvSpPr/>
+      <p:pic>
+        <p:nvPicPr>
+          <p:cNvPr id="27" name="Рисунок 26">
+            <a:extLst>
+              <a:ext uri="{FF2B5EF4-FFF2-40B4-BE49-F238E27FC236}">
+                <a16:creationId xmlns:a16="http://schemas.microsoft.com/office/drawing/2014/main" id="{8B2A0094-F6E3-2B85-3882-DFB2AF6365D7}"/>
+              </a:ext>
+            </a:extLst>
+          </p:cNvPr>
+          <p:cNvPicPr>
+            <a:picLocks noChangeAspect="1"/>
+          </p:cNvPicPr>
           <p:nvPr/>
-        </p:nvSpPr>
-        <p:spPr>
-          <a:xfrm>
-            <a:off x="521643" y="335682"/>
-            <a:ext cx="3392165" cy="366861"/>
+        </p:nvPicPr>
+        <p:blipFill>
+          <a:blip r:embed="rId3"/>
+          <a:stretch>
+            <a:fillRect/>
+          </a:stretch>
+        </p:blipFill>
+        <p:spPr>
+          <a:xfrm>
+            <a:off x="5558550" y="0"/>
+            <a:ext cx="3191750" cy="5143500"/>
           </a:xfrm>
           <a:prstGeom prst="rect">
             <a:avLst/>
           </a:prstGeom>
-          <a:noFill/>
-          <a:ln/>
-        </p:spPr>
-        <p:txBody>
-          <a:bodyPr wrap="none" lIns="0" tIns="0" rIns="0" bIns="0" rtlCol="0" anchor="t"/>
-          <a:lstStyle/>
-          <a:p>
-            <a:pPr marL="0" indent="0" algn="l">
-              <a:lnSpc>
-                <a:spcPct val="104000"/>
-              </a:lnSpc>
-              <a:buNone/>
-            </a:pPr>
-            <a:r>
-              <a:rPr lang="en-US" sz="2300" dirty="0">
-                <a:solidFill>
-                  <a:srgbClr val="091C53"/>
-                </a:solidFill>
-                <a:latin typeface="Instrument Sans SemiBold" pitchFamily="34" charset="0"/>
-                <a:ea typeface="Instrument Sans SemiBold" pitchFamily="34" charset="-122"/>
-                <a:cs typeface="Instrument Sans SemiBold" pitchFamily="34" charset="-120"/>
-              </a:rPr>
-              <a:t>Алгоритм работы</a:t>
-            </a:r>
-            <a:endParaRPr lang="en-US" sz="2300" dirty="0"/>
-          </a:p>
-        </p:txBody>
-      </p:sp>
+        </p:spPr>
+      </p:pic>
       <p:sp>
         <p:nvSpPr>
           <p:cNvPr id="3" name="Shape 1"/>
@@ -6388,7 +7089,7 @@
         </p:nvSpPr>
         <p:spPr>
           <a:xfrm>
-            <a:off x="521643" y="896987"/>
+            <a:off x="356543" y="923292"/>
             <a:ext cx="117351" cy="704404"/>
           </a:xfrm>
           <a:prstGeom prst="roundRect">
@@ -6410,8 +7111,8 @@
         </p:nvSpPr>
         <p:spPr>
           <a:xfrm>
-            <a:off x="736178" y="1014338"/>
-            <a:ext cx="1467445" cy="183431"/>
+            <a:off x="571079" y="1040643"/>
+            <a:ext cx="1225972" cy="241697"/>
           </a:xfrm>
           <a:prstGeom prst="rect">
             <a:avLst/>
@@ -6430,7 +7131,11 @@
               <a:buNone/>
             </a:pPr>
             <a:r>
-              <a:rPr lang="en-US" sz="1150" dirty="0">
+              <a:rPr lang="ru-RU" sz="1400" dirty="0"/>
+              <a:t>⌨️ </a:t>
+            </a:r>
+            <a:r>
+              <a:rPr lang="en-US" sz="1400" dirty="0" err="1">
                 <a:solidFill>
                   <a:srgbClr val="1E3063"/>
                 </a:solidFill>
@@ -6440,7 +7145,7 @@
               </a:rPr>
               <a:t>Ввод</a:t>
             </a:r>
-            <a:endParaRPr lang="en-US" sz="1150" dirty="0"/>
+            <a:endParaRPr lang="en-US" sz="1400" dirty="0"/>
           </a:p>
         </p:txBody>
       </p:sp>
@@ -6452,8 +7157,8 @@
         </p:nvSpPr>
         <p:spPr>
           <a:xfrm>
-            <a:off x="736178" y="1256035"/>
-            <a:ext cx="7886105" cy="171673"/>
+            <a:off x="571079" y="1282340"/>
+            <a:ext cx="2311822" cy="289023"/>
           </a:xfrm>
           <a:prstGeom prst="rect">
             <a:avLst/>
@@ -6472,7 +7177,7 @@
               <a:buNone/>
             </a:pPr>
             <a:r>
-              <a:rPr lang="en-US" sz="900" dirty="0">
+              <a:rPr lang="en-US" sz="1400" dirty="0">
                 <a:solidFill>
                   <a:srgbClr val="1E3063"/>
                 </a:solidFill>
@@ -6482,7 +7187,7 @@
               </a:rPr>
               <a:t>Ручной или загрузка файла</a:t>
             </a:r>
-            <a:endParaRPr lang="en-US" sz="900" dirty="0"/>
+            <a:endParaRPr lang="en-US" sz="1400" dirty="0"/>
           </a:p>
         </p:txBody>
       </p:sp>
@@ -6494,7 +7199,7 @@
         </p:nvSpPr>
         <p:spPr>
           <a:xfrm>
-            <a:off x="697706" y="1698575"/>
+            <a:off x="356543" y="1698575"/>
             <a:ext cx="117351" cy="704404"/>
           </a:xfrm>
           <a:prstGeom prst="roundRect">
@@ -6516,7 +7221,7 @@
         </p:nvSpPr>
         <p:spPr>
           <a:xfrm>
-            <a:off x="912242" y="1815926"/>
+            <a:off x="571079" y="1815926"/>
             <a:ext cx="1467445" cy="183431"/>
           </a:xfrm>
           <a:prstGeom prst="rect">
@@ -6536,7 +7241,11 @@
               <a:buNone/>
             </a:pPr>
             <a:r>
-              <a:rPr lang="en-US" sz="1150" dirty="0">
+              <a:rPr lang="ru-RU" sz="1400" dirty="0"/>
+              <a:t>✅ </a:t>
+            </a:r>
+            <a:r>
+              <a:rPr lang="en-US" sz="1400" dirty="0" err="1">
                 <a:solidFill>
                   <a:srgbClr val="1E3063"/>
                 </a:solidFill>
@@ -6546,7 +7255,7 @@
               </a:rPr>
               <a:t>Валидация</a:t>
             </a:r>
-            <a:endParaRPr lang="en-US" sz="1150" dirty="0"/>
+            <a:endParaRPr lang="en-US" sz="1400" dirty="0"/>
           </a:p>
         </p:txBody>
       </p:sp>
@@ -6558,8 +7267,8 @@
         </p:nvSpPr>
         <p:spPr>
           <a:xfrm>
-            <a:off x="912242" y="2057623"/>
-            <a:ext cx="7710041" cy="171673"/>
+            <a:off x="571080" y="2057623"/>
+            <a:ext cx="4510658" cy="171673"/>
           </a:xfrm>
           <a:prstGeom prst="rect">
             <a:avLst/>
@@ -6578,7 +7287,7 @@
               <a:buNone/>
             </a:pPr>
             <a:r>
-              <a:rPr lang="en-US" sz="900" dirty="0">
+              <a:rPr lang="en-US" sz="1400" dirty="0">
                 <a:solidFill>
                   <a:srgbClr val="1E3063"/>
                 </a:solidFill>
@@ -6588,7 +7297,7 @@
               </a:rPr>
               <a:t>Проверка наличия @, длины, допустимых символов</a:t>
             </a:r>
-            <a:endParaRPr lang="en-US" sz="900" dirty="0"/>
+            <a:endParaRPr lang="en-US" sz="1400" dirty="0"/>
           </a:p>
         </p:txBody>
       </p:sp>
@@ -6600,7 +7309,7 @@
         </p:nvSpPr>
         <p:spPr>
           <a:xfrm>
-            <a:off x="873844" y="2500164"/>
+            <a:off x="356543" y="2476252"/>
             <a:ext cx="117351" cy="704404"/>
           </a:xfrm>
           <a:prstGeom prst="roundRect">
@@ -6622,7 +7331,7 @@
         </p:nvSpPr>
         <p:spPr>
           <a:xfrm>
-            <a:off x="1088380" y="2617515"/>
+            <a:off x="571079" y="2593603"/>
             <a:ext cx="1467445" cy="183431"/>
           </a:xfrm>
           <a:prstGeom prst="rect">
@@ -6642,7 +7351,11 @@
               <a:buNone/>
             </a:pPr>
             <a:r>
-              <a:rPr lang="en-US" sz="1150" dirty="0">
+              <a:rPr lang="ru-RU" sz="1400" dirty="0"/>
+              <a:t>✂️ </a:t>
+            </a:r>
+            <a:r>
+              <a:rPr lang="en-US" sz="1400" dirty="0" err="1">
                 <a:solidFill>
                   <a:srgbClr val="1E3063"/>
                 </a:solidFill>
@@ -6650,9 +7363,20 @@
                 <a:ea typeface="Instrument Sans SemiBold" pitchFamily="34" charset="-122"/>
                 <a:cs typeface="Instrument Sans SemiBold" pitchFamily="34" charset="-120"/>
               </a:rPr>
-              <a:t>Выделение домена</a:t>
-            </a:r>
-            <a:endParaRPr lang="en-US" sz="1150" dirty="0"/>
+              <a:t>Выделение</a:t>
+            </a:r>
+            <a:r>
+              <a:rPr lang="en-US" sz="1400" dirty="0">
+                <a:solidFill>
+                  <a:srgbClr val="1E3063"/>
+                </a:solidFill>
+                <a:latin typeface="Instrument Sans SemiBold" pitchFamily="34" charset="0"/>
+                <a:ea typeface="Instrument Sans SemiBold" pitchFamily="34" charset="-122"/>
+                <a:cs typeface="Instrument Sans SemiBold" pitchFamily="34" charset="-120"/>
+              </a:rPr>
+              <a:t> домена</a:t>
+            </a:r>
+            <a:endParaRPr lang="en-US" sz="1400" dirty="0"/>
           </a:p>
         </p:txBody>
       </p:sp>
@@ -6664,8 +7388,8 @@
         </p:nvSpPr>
         <p:spPr>
           <a:xfrm>
-            <a:off x="1088380" y="2859212"/>
-            <a:ext cx="7533903" cy="171673"/>
+            <a:off x="571080" y="2835300"/>
+            <a:ext cx="3909070" cy="171673"/>
           </a:xfrm>
           <a:prstGeom prst="rect">
             <a:avLst/>
@@ -6684,7 +7408,7 @@
               <a:buNone/>
             </a:pPr>
             <a:r>
-              <a:rPr lang="en-US" sz="900" dirty="0">
+              <a:rPr lang="en-US" sz="1400" dirty="0">
                 <a:solidFill>
                   <a:srgbClr val="1E3063"/>
                 </a:solidFill>
@@ -6694,7 +7418,7 @@
               </a:rPr>
               <a:t>Приведение к lowercase</a:t>
             </a:r>
-            <a:endParaRPr lang="en-US" sz="900" dirty="0"/>
+            <a:endParaRPr lang="en-US" sz="1400" dirty="0"/>
           </a:p>
         </p:txBody>
       </p:sp>
@@ -6706,7 +7430,7 @@
         </p:nvSpPr>
         <p:spPr>
           <a:xfrm>
-            <a:off x="1049908" y="3301752"/>
+            <a:off x="356543" y="3250332"/>
             <a:ext cx="117351" cy="704404"/>
           </a:xfrm>
           <a:prstGeom prst="roundRect">
@@ -6728,7 +7452,7 @@
         </p:nvSpPr>
         <p:spPr>
           <a:xfrm>
-            <a:off x="1264444" y="3419103"/>
+            <a:off x="571079" y="3367683"/>
             <a:ext cx="1467445" cy="183431"/>
           </a:xfrm>
           <a:prstGeom prst="rect">
@@ -6748,7 +7472,11 @@
               <a:buNone/>
             </a:pPr>
             <a:r>
-              <a:rPr lang="en-US" sz="1150" dirty="0">
+              <a:rPr lang="ru-RU" sz="1400" dirty="0"/>
+              <a:t>🔎 </a:t>
+            </a:r>
+            <a:r>
+              <a:rPr lang="en-US" sz="1400" dirty="0" err="1">
                 <a:solidFill>
                   <a:srgbClr val="1E3063"/>
                 </a:solidFill>
@@ -6758,7 +7486,7 @@
               </a:rPr>
               <a:t>Поиск</a:t>
             </a:r>
-            <a:endParaRPr lang="en-US" sz="1150" dirty="0"/>
+            <a:endParaRPr lang="en-US" sz="1400" dirty="0"/>
           </a:p>
         </p:txBody>
       </p:sp>
@@ -6770,8 +7498,8 @@
         </p:nvSpPr>
         <p:spPr>
           <a:xfrm>
-            <a:off x="1264444" y="3660800"/>
-            <a:ext cx="7357839" cy="171673"/>
+            <a:off x="571079" y="3621138"/>
+            <a:ext cx="3733007" cy="171673"/>
           </a:xfrm>
           <a:prstGeom prst="rect">
             <a:avLst/>
@@ -6790,7 +7518,7 @@
               <a:buNone/>
             </a:pPr>
             <a:r>
-              <a:rPr lang="en-US" sz="900" dirty="0">
+              <a:rPr lang="en-US" sz="1400" dirty="0">
                 <a:solidFill>
                   <a:srgbClr val="1E3063"/>
                 </a:solidFill>
@@ -6800,7 +7528,7 @@
               </a:rPr>
               <a:t>unordered_set → O(1)</a:t>
             </a:r>
-            <a:endParaRPr lang="en-US" sz="900" dirty="0"/>
+            <a:endParaRPr lang="en-US" sz="1400" dirty="0"/>
           </a:p>
         </p:txBody>
       </p:sp>
@@ -6812,7 +7540,7 @@
         </p:nvSpPr>
         <p:spPr>
           <a:xfrm>
-            <a:off x="873844" y="4103340"/>
+            <a:off x="356543" y="4024412"/>
             <a:ext cx="117351" cy="704404"/>
           </a:xfrm>
           <a:prstGeom prst="roundRect">
@@ -6834,7 +7562,7 @@
         </p:nvSpPr>
         <p:spPr>
           <a:xfrm>
-            <a:off x="1088380" y="4220691"/>
+            <a:off x="571079" y="4141763"/>
             <a:ext cx="1467445" cy="183431"/>
           </a:xfrm>
           <a:prstGeom prst="rect">
@@ -6854,7 +7582,11 @@
               <a:buNone/>
             </a:pPr>
             <a:r>
-              <a:rPr lang="en-US" sz="1150" dirty="0">
+              <a:rPr lang="ru-RU" sz="1400" dirty="0"/>
+              <a:t>📊 </a:t>
+            </a:r>
+            <a:r>
+              <a:rPr lang="en-US" sz="1400" dirty="0" err="1">
                 <a:solidFill>
                   <a:srgbClr val="1E3063"/>
                 </a:solidFill>
@@ -6864,7 +7596,7 @@
               </a:rPr>
               <a:t>Результат</a:t>
             </a:r>
-            <a:endParaRPr lang="en-US" sz="1150" dirty="0"/>
+            <a:endParaRPr lang="en-US" sz="1400" dirty="0"/>
           </a:p>
         </p:txBody>
       </p:sp>
@@ -6876,8 +7608,8 @@
         </p:nvSpPr>
         <p:spPr>
           <a:xfrm>
-            <a:off x="1088380" y="4462388"/>
-            <a:ext cx="7533903" cy="171673"/>
+            <a:off x="571080" y="4383460"/>
+            <a:ext cx="3375670" cy="171673"/>
           </a:xfrm>
           <a:prstGeom prst="rect">
             <a:avLst/>
@@ -6896,7 +7628,7 @@
               <a:buNone/>
             </a:pPr>
             <a:r>
-              <a:rPr lang="en-US" sz="900" dirty="0">
+              <a:rPr lang="en-US" sz="1400" dirty="0">
                 <a:solidFill>
                   <a:srgbClr val="1E3063"/>
                 </a:solidFill>
@@ -6906,7 +7638,54 @@
               </a:rPr>
               <a:t>Таблица + лог + экспорт отчёта</a:t>
             </a:r>
-            <a:endParaRPr lang="en-US" sz="900" dirty="0"/>
+            <a:endParaRPr lang="en-US" sz="1400" dirty="0"/>
+          </a:p>
+        </p:txBody>
+      </p:sp>
+      <p:sp>
+        <p:nvSpPr>
+          <p:cNvPr id="2" name="Text 0">
+            <a:extLst>
+              <a:ext uri="{FF2B5EF4-FFF2-40B4-BE49-F238E27FC236}">
+                <a16:creationId xmlns:a16="http://schemas.microsoft.com/office/drawing/2014/main" id="{83949650-C42C-631F-39CB-17C58F969A06}"/>
+              </a:ext>
+            </a:extLst>
+          </p:cNvPr>
+          <p:cNvSpPr/>
+          <p:nvPr/>
+        </p:nvSpPr>
+        <p:spPr>
+          <a:xfrm>
+            <a:off x="0" y="2969"/>
+            <a:ext cx="9144000" cy="687065"/>
+          </a:xfrm>
+          <a:prstGeom prst="rect">
+            <a:avLst/>
+          </a:prstGeom>
+          <a:noFill/>
+          <a:ln/>
+        </p:spPr>
+        <p:txBody>
+          <a:bodyPr wrap="none" lIns="0" tIns="0" rIns="0" bIns="0" rtlCol="0" anchor="t"/>
+          <a:lstStyle/>
+          <a:p>
+            <a:pPr marL="0" indent="0" algn="ctr">
+              <a:lnSpc>
+                <a:spcPct val="104000"/>
+              </a:lnSpc>
+              <a:buNone/>
+            </a:pPr>
+            <a:r>
+              <a:rPr lang="ru-RU" sz="2800" dirty="0">
+                <a:solidFill>
+                  <a:srgbClr val="091C53"/>
+                </a:solidFill>
+                <a:latin typeface="Instrument Sans SemiBold" pitchFamily="34" charset="0"/>
+                <a:ea typeface="Instrument Sans SemiBold" pitchFamily="34" charset="-122"/>
+                <a:cs typeface="Instrument Sans SemiBold" pitchFamily="34" charset="-120"/>
+              </a:rPr>
+              <a:t>Алгоритм работы</a:t>
+            </a:r>
           </a:p>
         </p:txBody>
       </p:sp>
@@ -6918,7 +7697,7 @@
 </p:sld>
 </file>
 
-<file path=ppt/slides/slide5.xml><?xml version="1.0" encoding="utf-8"?>
+<file path=ppt/slides/slide6.xml><?xml version="1.0" encoding="utf-8"?>
 <p:sld xmlns:a="http://schemas.openxmlformats.org/drawingml/2006/main" xmlns:r="http://schemas.openxmlformats.org/officeDocument/2006/relationships" xmlns:p="http://schemas.openxmlformats.org/presentationml/2006/main">
   <p:cSld name="Slide 5">
     <p:spTree>
@@ -6959,14 +7738,14 @@
       </p:sp>
       <p:sp>
         <p:nvSpPr>
-          <p:cNvPr id="3" name="Text 1"/>
+          <p:cNvPr id="8" name="Text 2"/>
           <p:cNvSpPr/>
           <p:nvPr/>
         </p:nvSpPr>
         <p:spPr>
           <a:xfrm>
-            <a:off x="496119" y="218157"/>
-            <a:ext cx="5240759" cy="442987"/>
+            <a:off x="267519" y="4777879"/>
+            <a:ext cx="8380363" cy="226814"/>
           </a:xfrm>
           <a:prstGeom prst="rect">
             <a:avLst/>
@@ -6978,48 +7757,6 @@
           <a:bodyPr wrap="none" lIns="0" tIns="0" rIns="0" bIns="0" rtlCol="0" anchor="t"/>
           <a:lstStyle/>
           <a:p>
-            <a:pPr marL="0" indent="0" algn="l">
-              <a:lnSpc>
-                <a:spcPct val="104000"/>
-              </a:lnSpc>
-              <a:buNone/>
-            </a:pPr>
-            <a:r>
-              <a:rPr lang="en-US" sz="2750" dirty="0">
-                <a:solidFill>
-                  <a:srgbClr val="091C53"/>
-                </a:solidFill>
-                <a:latin typeface="Instrument Sans SemiBold" pitchFamily="34" charset="0"/>
-                <a:ea typeface="Instrument Sans SemiBold" pitchFamily="34" charset="-122"/>
-                <a:cs typeface="Instrument Sans SemiBold" pitchFamily="34" charset="-120"/>
-              </a:rPr>
-              <a:t>Демонстрация приложения</a:t>
-            </a:r>
-            <a:endParaRPr lang="en-US" sz="2750" dirty="0"/>
-          </a:p>
-        </p:txBody>
-      </p:sp>
-      <p:sp>
-        <p:nvSpPr>
-          <p:cNvPr id="8" name="Text 2"/>
-          <p:cNvSpPr/>
-          <p:nvPr/>
-        </p:nvSpPr>
-        <p:spPr>
-          <a:xfrm>
-            <a:off x="267519" y="4777879"/>
-            <a:ext cx="8380363" cy="226814"/>
-          </a:xfrm>
-          <a:prstGeom prst="rect">
-            <a:avLst/>
-          </a:prstGeom>
-          <a:noFill/>
-          <a:ln/>
-        </p:spPr>
-        <p:txBody>
-          <a:bodyPr wrap="none" lIns="0" tIns="0" rIns="0" bIns="0" rtlCol="0" anchor="t"/>
-          <a:lstStyle/>
-          <a:p>
             <a:pPr marL="0" indent="0" algn="ctr">
               <a:lnSpc>
                 <a:spcPct val="133000"/>
@@ -7035,7 +7772,29 @@
                 <a:ea typeface="Instrument Sans Medium" pitchFamily="34" charset="-122"/>
                 <a:cs typeface="Instrument Sans Medium" pitchFamily="34" charset="-120"/>
               </a:rPr>
-              <a:t>Скриншоты: одиночная проверка, обнаружение disposable, пакетная обработка, экспорт отчёта</a:t>
+              <a:t>Скриншоты: одиночная проверка, </a:t>
+            </a:r>
+            <a:r>
+              <a:rPr lang="en-US" sz="1100" dirty="0" err="1">
+                <a:solidFill>
+                  <a:srgbClr val="1E3063"/>
+                </a:solidFill>
+                <a:latin typeface="Instrument Sans Medium" pitchFamily="34" charset="0"/>
+                <a:ea typeface="Instrument Sans Medium" pitchFamily="34" charset="-122"/>
+                <a:cs typeface="Instrument Sans Medium" pitchFamily="34" charset="-120"/>
+              </a:rPr>
+              <a:t>обнаружение</a:t>
+            </a:r>
+            <a:r>
+              <a:rPr lang="en-US" sz="1100" dirty="0">
+                <a:solidFill>
+                  <a:srgbClr val="1E3063"/>
+                </a:solidFill>
+                <a:latin typeface="Instrument Sans Medium" pitchFamily="34" charset="0"/>
+                <a:ea typeface="Instrument Sans Medium" pitchFamily="34" charset="-122"/>
+                <a:cs typeface="Instrument Sans Medium" pitchFamily="34" charset="-120"/>
+              </a:rPr>
+              <a:t> disposable</a:t>
             </a:r>
             <a:endParaRPr lang="en-US" sz="1100" dirty="0"/>
           </a:p>
@@ -7063,8 +7822,8 @@
         </p:blipFill>
         <p:spPr>
           <a:xfrm>
-            <a:off x="496119" y="938819"/>
-            <a:ext cx="2738651" cy="1926918"/>
+            <a:off x="267519" y="1289695"/>
+            <a:ext cx="3986981" cy="2805244"/>
           </a:xfrm>
           <a:prstGeom prst="rect">
             <a:avLst/>
@@ -7093,20 +7852,225 @@
         </p:blipFill>
         <p:spPr>
           <a:xfrm>
-            <a:off x="1385118" y="2855831"/>
-            <a:ext cx="2779396" cy="1926844"/>
+            <a:off x="4889502" y="1289695"/>
+            <a:ext cx="4046453" cy="2805244"/>
           </a:xfrm>
           <a:prstGeom prst="rect">
             <a:avLst/>
           </a:prstGeom>
         </p:spPr>
       </p:pic>
+      <p:sp>
+        <p:nvSpPr>
+          <p:cNvPr id="3" name="Text 0">
+            <a:extLst>
+              <a:ext uri="{FF2B5EF4-FFF2-40B4-BE49-F238E27FC236}">
+                <a16:creationId xmlns:a16="http://schemas.microsoft.com/office/drawing/2014/main" id="{061CD0FB-2D4B-2360-D542-3AB237321890}"/>
+              </a:ext>
+            </a:extLst>
+          </p:cNvPr>
+          <p:cNvSpPr/>
+          <p:nvPr/>
+        </p:nvSpPr>
+        <p:spPr>
+          <a:xfrm>
+            <a:off x="0" y="2969"/>
+            <a:ext cx="9144000" cy="687065"/>
+          </a:xfrm>
+          <a:prstGeom prst="rect">
+            <a:avLst/>
+          </a:prstGeom>
+          <a:noFill/>
+          <a:ln/>
+        </p:spPr>
+        <p:txBody>
+          <a:bodyPr wrap="none" lIns="0" tIns="0" rIns="0" bIns="0" rtlCol="0" anchor="t"/>
+          <a:lstStyle/>
+          <a:p>
+            <a:pPr marL="0" indent="0" algn="ctr">
+              <a:lnSpc>
+                <a:spcPct val="104000"/>
+              </a:lnSpc>
+              <a:buNone/>
+            </a:pPr>
+            <a:r>
+              <a:rPr lang="ru-RU" sz="2800" dirty="0">
+                <a:solidFill>
+                  <a:srgbClr val="091C53"/>
+                </a:solidFill>
+                <a:latin typeface="Instrument Sans SemiBold" pitchFamily="34" charset="0"/>
+                <a:ea typeface="Instrument Sans SemiBold" pitchFamily="34" charset="-122"/>
+                <a:cs typeface="Instrument Sans SemiBold" pitchFamily="34" charset="-120"/>
+              </a:rPr>
+              <a:t>Демонстрация приложения</a:t>
+            </a:r>
+          </a:p>
+        </p:txBody>
+      </p:sp>
+    </p:spTree>
+  </p:cSld>
+  <p:clrMapOvr>
+    <a:masterClrMapping/>
+  </p:clrMapOvr>
+</p:sld>
+</file>
+
+<file path=ppt/slides/slide7.xml><?xml version="1.0" encoding="utf-8"?>
+<p:sld xmlns:a="http://schemas.openxmlformats.org/drawingml/2006/main" xmlns:r="http://schemas.openxmlformats.org/officeDocument/2006/relationships" xmlns:p="http://schemas.openxmlformats.org/presentationml/2006/main">
+  <p:cSld>
+    <p:spTree>
+      <p:nvGrpSpPr>
+        <p:cNvPr id="1" name=""/>
+        <p:cNvGrpSpPr/>
+        <p:nvPr/>
+      </p:nvGrpSpPr>
+      <p:grpSpPr>
+        <a:xfrm>
+          <a:off x="0" y="0"/>
+          <a:ext cx="0" cy="0"/>
+          <a:chOff x="0" y="0"/>
+          <a:chExt cx="0" cy="0"/>
+        </a:xfrm>
+      </p:grpSpPr>
+      <p:sp>
+        <p:nvSpPr>
+          <p:cNvPr id="2" name="Shape 0"/>
+          <p:cNvSpPr/>
+          <p:nvPr/>
+        </p:nvSpPr>
+        <p:spPr>
+          <a:xfrm>
+            <a:off x="496119" y="872728"/>
+            <a:ext cx="8151763" cy="10567"/>
+          </a:xfrm>
+          <a:prstGeom prst="rect">
+            <a:avLst/>
+          </a:prstGeom>
+          <a:solidFill>
+            <a:srgbClr val="1E3063">
+              <a:alpha val="50000"/>
+            </a:srgbClr>
+          </a:solidFill>
+          <a:ln/>
+        </p:spPr>
+      </p:sp>
+      <p:sp>
+        <p:nvSpPr>
+          <p:cNvPr id="8" name="Text 2"/>
+          <p:cNvSpPr/>
+          <p:nvPr/>
+        </p:nvSpPr>
+        <p:spPr>
+          <a:xfrm>
+            <a:off x="267519" y="4777879"/>
+            <a:ext cx="8380363" cy="226814"/>
+          </a:xfrm>
+          <a:prstGeom prst="rect">
+            <a:avLst/>
+          </a:prstGeom>
+          <a:noFill/>
+          <a:ln/>
+        </p:spPr>
+        <p:txBody>
+          <a:bodyPr wrap="none" lIns="0" tIns="0" rIns="0" bIns="0" rtlCol="0" anchor="t"/>
+          <a:lstStyle/>
+          <a:p>
+            <a:pPr marL="0" indent="0" algn="ctr">
+              <a:lnSpc>
+                <a:spcPct val="133000"/>
+              </a:lnSpc>
+              <a:buNone/>
+            </a:pPr>
+            <a:r>
+              <a:rPr lang="en-US" sz="1100" dirty="0">
+                <a:solidFill>
+                  <a:srgbClr val="1E3063"/>
+                </a:solidFill>
+                <a:latin typeface="Instrument Sans Medium" pitchFamily="34" charset="0"/>
+                <a:ea typeface="Instrument Sans Medium" pitchFamily="34" charset="-122"/>
+                <a:cs typeface="Instrument Sans Medium" pitchFamily="34" charset="-120"/>
+              </a:rPr>
+              <a:t>Скриншоты: </a:t>
+            </a:r>
+            <a:r>
+              <a:rPr lang="en-US" sz="1100" dirty="0" err="1">
+                <a:solidFill>
+                  <a:srgbClr val="1E3063"/>
+                </a:solidFill>
+                <a:latin typeface="Instrument Sans Medium" pitchFamily="34" charset="0"/>
+                <a:ea typeface="Instrument Sans Medium" pitchFamily="34" charset="-122"/>
+                <a:cs typeface="Instrument Sans Medium" pitchFamily="34" charset="-120"/>
+              </a:rPr>
+              <a:t>пакетная</a:t>
+            </a:r>
+            <a:r>
+              <a:rPr lang="en-US" sz="1100" dirty="0">
+                <a:solidFill>
+                  <a:srgbClr val="1E3063"/>
+                </a:solidFill>
+                <a:latin typeface="Instrument Sans Medium" pitchFamily="34" charset="0"/>
+                <a:ea typeface="Instrument Sans Medium" pitchFamily="34" charset="-122"/>
+                <a:cs typeface="Instrument Sans Medium" pitchFamily="34" charset="-120"/>
+              </a:rPr>
+              <a:t> обработка, экспорт отчёта</a:t>
+            </a:r>
+            <a:endParaRPr lang="en-US" sz="1100" dirty="0"/>
+          </a:p>
+        </p:txBody>
+      </p:sp>
+      <p:sp>
+        <p:nvSpPr>
+          <p:cNvPr id="3" name="Text 0">
+            <a:extLst>
+              <a:ext uri="{FF2B5EF4-FFF2-40B4-BE49-F238E27FC236}">
+                <a16:creationId xmlns:a16="http://schemas.microsoft.com/office/drawing/2014/main" id="{061CD0FB-2D4B-2360-D542-3AB237321890}"/>
+              </a:ext>
+            </a:extLst>
+          </p:cNvPr>
+          <p:cNvSpPr/>
+          <p:nvPr/>
+        </p:nvSpPr>
+        <p:spPr>
+          <a:xfrm>
+            <a:off x="0" y="2969"/>
+            <a:ext cx="9144000" cy="687065"/>
+          </a:xfrm>
+          <a:prstGeom prst="rect">
+            <a:avLst/>
+          </a:prstGeom>
+          <a:noFill/>
+          <a:ln/>
+        </p:spPr>
+        <p:txBody>
+          <a:bodyPr wrap="none" lIns="0" tIns="0" rIns="0" bIns="0" rtlCol="0" anchor="t"/>
+          <a:lstStyle/>
+          <a:p>
+            <a:pPr marL="0" indent="0" algn="ctr">
+              <a:lnSpc>
+                <a:spcPct val="104000"/>
+              </a:lnSpc>
+              <a:buNone/>
+            </a:pPr>
+            <a:r>
+              <a:rPr lang="ru-RU" sz="2800" dirty="0">
+                <a:solidFill>
+                  <a:srgbClr val="091C53"/>
+                </a:solidFill>
+                <a:latin typeface="Instrument Sans SemiBold" pitchFamily="34" charset="0"/>
+                <a:ea typeface="Instrument Sans SemiBold" pitchFamily="34" charset="-122"/>
+                <a:cs typeface="Instrument Sans SemiBold" pitchFamily="34" charset="-120"/>
+              </a:rPr>
+              <a:t>Демонстрация приложения</a:t>
+            </a:r>
+          </a:p>
+        </p:txBody>
+      </p:sp>
       <p:pic>
         <p:nvPicPr>
-          <p:cNvPr id="16" name="Рисунок 15">
+          <p:cNvPr id="4" name="Рисунок 3">
             <a:extLst>
               <a:ext uri="{FF2B5EF4-FFF2-40B4-BE49-F238E27FC236}">
-                <a16:creationId xmlns:a16="http://schemas.microsoft.com/office/drawing/2014/main" id="{BA4589B5-96B5-0CF2-9AD9-25BE9B52B39D}"/>
+                <a16:creationId xmlns:a16="http://schemas.microsoft.com/office/drawing/2014/main" id="{FFAD93F1-E7FF-75C9-65A3-E59639AF5601}"/>
               </a:ext>
             </a:extLst>
           </p:cNvPr>
@@ -7116,15 +8080,15 @@
           <p:nvPr/>
         </p:nvPicPr>
         <p:blipFill>
-          <a:blip r:embed="rId5"/>
+          <a:blip r:embed="rId3"/>
           <a:stretch>
             <a:fillRect/>
           </a:stretch>
         </p:blipFill>
         <p:spPr>
           <a:xfrm>
-            <a:off x="4374081" y="2916151"/>
-            <a:ext cx="2725594" cy="1926844"/>
+            <a:off x="267519" y="1289695"/>
+            <a:ext cx="3986980" cy="2818574"/>
           </a:xfrm>
           <a:prstGeom prst="rect">
             <a:avLst/>
@@ -7146,15 +8110,15 @@
           <p:nvPr/>
         </p:nvPicPr>
         <p:blipFill>
-          <a:blip r:embed="rId6"/>
+          <a:blip r:embed="rId4"/>
           <a:stretch>
             <a:fillRect/>
           </a:stretch>
         </p:blipFill>
         <p:spPr>
           <a:xfrm>
-            <a:off x="6003608" y="938819"/>
-            <a:ext cx="2644274" cy="1921808"/>
+            <a:off x="4889502" y="1289695"/>
+            <a:ext cx="3885382" cy="2823822"/>
           </a:xfrm>
           <a:prstGeom prst="rect">
             <a:avLst/>
@@ -7162,6 +8126,11 @@
         </p:spPr>
       </p:pic>
     </p:spTree>
+    <p:extLst>
+      <p:ext uri="{BB962C8B-B14F-4D97-AF65-F5344CB8AC3E}">
+        <p14:creationId xmlns:p14="http://schemas.microsoft.com/office/powerpoint/2010/main" val="1065061100"/>
+      </p:ext>
+    </p:extLst>
   </p:cSld>
   <p:clrMapOvr>
     <a:masterClrMapping/>
@@ -7169,7 +8138,7 @@
 </p:sld>
 </file>
 
-<file path=ppt/slides/slide6.xml><?xml version="1.0" encoding="utf-8"?>
+<file path=ppt/slides/slide8.xml><?xml version="1.0" encoding="utf-8"?>
 <p:sld xmlns:a="http://schemas.openxmlformats.org/drawingml/2006/main" xmlns:r="http://schemas.openxmlformats.org/officeDocument/2006/relationships" xmlns:p="http://schemas.openxmlformats.org/presentationml/2006/main">
   <p:cSld name="Slide 6">
     <p:spTree>
@@ -7188,14 +8157,14 @@
       </p:grpSpPr>
       <p:sp>
         <p:nvSpPr>
-          <p:cNvPr id="2" name="Text 0"/>
+          <p:cNvPr id="3" name="Text 1"/>
           <p:cNvSpPr/>
           <p:nvPr/>
         </p:nvSpPr>
         <p:spPr>
           <a:xfrm>
-            <a:off x="3743102" y="674340"/>
-            <a:ext cx="4447580" cy="442987"/>
+            <a:off x="496119" y="1471687"/>
+            <a:ext cx="4752677" cy="2457004"/>
           </a:xfrm>
           <a:prstGeom prst="rect">
             <a:avLst/>
@@ -7204,52 +8173,10 @@
           <a:ln/>
         </p:spPr>
         <p:txBody>
-          <a:bodyPr wrap="none" lIns="0" tIns="0" rIns="0" bIns="0" rtlCol="0" anchor="t"/>
-          <a:lstStyle/>
-          <a:p>
-            <a:pPr marL="0" indent="0" algn="r" rtl="1">
-              <a:lnSpc>
-                <a:spcPct val="104000"/>
-              </a:lnSpc>
-              <a:buNone/>
-            </a:pPr>
-            <a:r>
-              <a:rPr lang="en-US" sz="2750" dirty="0">
-                <a:solidFill>
-                  <a:srgbClr val="091C53"/>
-                </a:solidFill>
-                <a:latin typeface="Instrument Sans SemiBold" pitchFamily="34" charset="0"/>
-                <a:ea typeface="Instrument Sans SemiBold" pitchFamily="34" charset="-122"/>
-                <a:cs typeface="Instrument Sans SemiBold" pitchFamily="34" charset="-120"/>
-              </a:rPr>
-              <a:t>Результаты тестирования</a:t>
-            </a:r>
-            <a:endParaRPr lang="en-US" sz="2750" dirty="0"/>
-          </a:p>
-        </p:txBody>
-      </p:sp>
-      <p:sp>
-        <p:nvSpPr>
-          <p:cNvPr id="3" name="Text 1"/>
-          <p:cNvSpPr/>
-          <p:nvPr/>
-        </p:nvSpPr>
-        <p:spPr>
-          <a:xfrm>
-            <a:off x="496119" y="1457474"/>
-            <a:ext cx="4752677" cy="1644253"/>
-          </a:xfrm>
-          <a:prstGeom prst="rect">
-            <a:avLst/>
-          </a:prstGeom>
-          <a:noFill/>
-          <a:ln/>
-        </p:spPr>
-        <p:txBody>
           <a:bodyPr wrap="square" lIns="0" tIns="0" rIns="0" bIns="0" rtlCol="0" anchor="t"/>
           <a:lstStyle/>
           <a:p>
-            <a:pPr marL="0" indent="0" algn="r" rtl="1">
+            <a:pPr marL="0" indent="0" rtl="1">
               <a:lnSpc>
                 <a:spcPct val="133000"/>
               </a:lnSpc>
@@ -7259,7 +8186,7 @@
               <a:buNone/>
             </a:pPr>
             <a:r>
-              <a:rPr lang="en-US" sz="1100" dirty="0">
+              <a:rPr lang="en-US" sz="1400" dirty="0">
                 <a:solidFill>
                   <a:srgbClr val="1E3063"/>
                 </a:solidFill>
@@ -7269,10 +8196,10 @@
               </a:rPr>
               <a:t>Всего тестовых записей: 175</a:t>
             </a:r>
-            <a:endParaRPr lang="en-US" sz="1100" dirty="0"/>
-          </a:p>
-          <a:p>
-            <a:pPr marL="0" indent="0" algn="r" rtl="1">
+            <a:endParaRPr lang="en-US" sz="1400" dirty="0"/>
+          </a:p>
+          <a:p>
+            <a:pPr marL="0" indent="0" rtl="1">
               <a:lnSpc>
                 <a:spcPct val="133000"/>
               </a:lnSpc>
@@ -7282,7 +8209,7 @@
               <a:buNone/>
             </a:pPr>
             <a:r>
-              <a:rPr lang="en-US" sz="1100" dirty="0">
+              <a:rPr lang="en-US" sz="1400" dirty="0">
                 <a:solidFill>
                   <a:srgbClr val="1E3063"/>
                 </a:solidFill>
@@ -7292,10 +8219,10 @@
               </a:rPr>
               <a:t>Временных: 55</a:t>
             </a:r>
-            <a:endParaRPr lang="en-US" sz="1100" dirty="0"/>
-          </a:p>
-          <a:p>
-            <a:pPr marL="0" indent="0" algn="r" rtl="1">
+            <a:endParaRPr lang="en-US" sz="1400" dirty="0"/>
+          </a:p>
+          <a:p>
+            <a:pPr marL="0" indent="0" rtl="1">
               <a:lnSpc>
                 <a:spcPct val="133000"/>
               </a:lnSpc>
@@ -7305,7 +8232,7 @@
               <a:buNone/>
             </a:pPr>
             <a:r>
-              <a:rPr lang="en-US" sz="1100" dirty="0">
+              <a:rPr lang="en-US" sz="1400" dirty="0">
                 <a:solidFill>
                   <a:srgbClr val="1E3063"/>
                 </a:solidFill>
@@ -7315,10 +8242,10 @@
               </a:rPr>
               <a:t>Постоянных: 63</a:t>
             </a:r>
-            <a:endParaRPr lang="en-US" sz="1100" dirty="0"/>
-          </a:p>
-          <a:p>
-            <a:pPr marL="0" indent="0" algn="r" rtl="1">
+            <a:endParaRPr lang="en-US" sz="1400" dirty="0"/>
+          </a:p>
+          <a:p>
+            <a:pPr marL="0" indent="0" rtl="1">
               <a:lnSpc>
                 <a:spcPct val="133000"/>
               </a:lnSpc>
@@ -7328,7 +8255,7 @@
               <a:buNone/>
             </a:pPr>
             <a:r>
-              <a:rPr lang="en-US" sz="1100" dirty="0">
+              <a:rPr lang="en-US" sz="1400" dirty="0">
                 <a:solidFill>
                   <a:srgbClr val="1E3063"/>
                 </a:solidFill>
@@ -7338,17 +8265,17 @@
               </a:rPr>
               <a:t>Некорректных: 57</a:t>
             </a:r>
-            <a:endParaRPr lang="en-US" sz="1100" dirty="0"/>
-          </a:p>
-          <a:p>
-            <a:pPr marL="0" indent="0" algn="r">
+            <a:endParaRPr lang="en-US" sz="1400" dirty="0"/>
+          </a:p>
+          <a:p>
+            <a:pPr marL="0" indent="0">
               <a:lnSpc>
                 <a:spcPct val="133000"/>
               </a:lnSpc>
               <a:buNone/>
             </a:pPr>
             <a:r>
-              <a:rPr lang="en-US" sz="1100" dirty="0">
+              <a:rPr lang="en-US" sz="1400" dirty="0">
                 <a:solidFill>
                   <a:srgbClr val="1E3063"/>
                 </a:solidFill>
@@ -7358,7 +8285,7 @@
               </a:rPr>
               <a:t>Тесты пройдены: корректная классификация, экспорт в UTF‑8 с BOM.</a:t>
             </a:r>
-            <a:endParaRPr lang="en-US" sz="1100" dirty="0"/>
+            <a:endParaRPr lang="en-US" sz="1400" dirty="0"/>
           </a:p>
         </p:txBody>
       </p:sp>
@@ -7390,7 +8317,7 @@
               <a:buNone/>
             </a:pPr>
             <a:r>
-              <a:rPr lang="en-US" sz="1350" dirty="0">
+              <a:rPr lang="en-US" sz="1400" dirty="0">
                 <a:solidFill>
                   <a:srgbClr val="091C53"/>
                 </a:solidFill>
@@ -7400,7 +8327,7 @@
               </a:rPr>
               <a:t>Визуализация — сводка</a:t>
             </a:r>
-            <a:endParaRPr lang="en-US" sz="1350" dirty="0"/>
+            <a:endParaRPr lang="en-US" sz="1400" dirty="0"/>
           </a:p>
         </p:txBody>
       </p:sp>
@@ -7428,6 +8355,53 @@
           </a:prstGeom>
         </p:spPr>
       </p:pic>
+      <p:sp>
+        <p:nvSpPr>
+          <p:cNvPr id="2" name="Text 0">
+            <a:extLst>
+              <a:ext uri="{FF2B5EF4-FFF2-40B4-BE49-F238E27FC236}">
+                <a16:creationId xmlns:a16="http://schemas.microsoft.com/office/drawing/2014/main" id="{BACA9D2E-DD19-2A14-693B-19BE5A2BB051}"/>
+              </a:ext>
+            </a:extLst>
+          </p:cNvPr>
+          <p:cNvSpPr/>
+          <p:nvPr/>
+        </p:nvSpPr>
+        <p:spPr>
+          <a:xfrm>
+            <a:off x="0" y="2969"/>
+            <a:ext cx="9144000" cy="687065"/>
+          </a:xfrm>
+          <a:prstGeom prst="rect">
+            <a:avLst/>
+          </a:prstGeom>
+          <a:noFill/>
+          <a:ln/>
+        </p:spPr>
+        <p:txBody>
+          <a:bodyPr wrap="none" lIns="0" tIns="0" rIns="0" bIns="0" rtlCol="0" anchor="t"/>
+          <a:lstStyle/>
+          <a:p>
+            <a:pPr marL="0" indent="0" algn="ctr">
+              <a:lnSpc>
+                <a:spcPct val="104000"/>
+              </a:lnSpc>
+              <a:buNone/>
+            </a:pPr>
+            <a:r>
+              <a:rPr lang="ru-RU" sz="2800" dirty="0">
+                <a:solidFill>
+                  <a:srgbClr val="091C53"/>
+                </a:solidFill>
+                <a:latin typeface="Instrument Sans SemiBold" pitchFamily="34" charset="0"/>
+                <a:ea typeface="Instrument Sans SemiBold" pitchFamily="34" charset="-122"/>
+                <a:cs typeface="Instrument Sans SemiBold" pitchFamily="34" charset="-120"/>
+              </a:rPr>
+              <a:t>Результаты тестирования</a:t>
+            </a:r>
+          </a:p>
+        </p:txBody>
+      </p:sp>
     </p:spTree>
   </p:cSld>
   <p:clrMapOvr>
@@ -7436,7 +8410,7 @@
 </p:sld>
 </file>
 
-<file path=ppt/slides/slide7.xml><?xml version="1.0" encoding="utf-8"?>
+<file path=ppt/slides/slide9.xml><?xml version="1.0" encoding="utf-8"?>
 <p:sld xmlns:a="http://schemas.openxmlformats.org/drawingml/2006/main" xmlns:r="http://schemas.openxmlformats.org/officeDocument/2006/relationships" xmlns:p="http://schemas.openxmlformats.org/presentationml/2006/main">
   <p:cSld name="Slide 7">
     <p:spTree>
@@ -7455,14 +8429,53 @@
       </p:grpSpPr>
       <p:sp>
         <p:nvSpPr>
-          <p:cNvPr id="2" name="Text 0"/>
+          <p:cNvPr id="12" name="Shape 1">
+            <a:extLst>
+              <a:ext uri="{FF2B5EF4-FFF2-40B4-BE49-F238E27FC236}">
+                <a16:creationId xmlns:a16="http://schemas.microsoft.com/office/drawing/2014/main" id="{179DBEB7-6E73-65A9-ED27-8E9E4E37A788}"/>
+              </a:ext>
+            </a:extLst>
+          </p:cNvPr>
           <p:cNvSpPr/>
           <p:nvPr/>
         </p:nvSpPr>
         <p:spPr>
           <a:xfrm>
-            <a:off x="457349" y="386655"/>
-            <a:ext cx="4249862" cy="408384"/>
+            <a:off x="895352" y="776287"/>
+            <a:ext cx="3351981" cy="1795463"/>
+          </a:xfrm>
+          <a:prstGeom prst="roundRect">
+            <a:avLst>
+              <a:gd name="adj" fmla="val 11207"/>
+            </a:avLst>
+          </a:prstGeom>
+          <a:solidFill>
+            <a:srgbClr val="FFFFFF"/>
+          </a:solidFill>
+          <a:ln w="19050">
+            <a:solidFill>
+              <a:srgbClr val="B4CCE3"/>
+            </a:solidFill>
+            <a:prstDash val="solid"/>
+          </a:ln>
+        </p:spPr>
+      </p:sp>
+      <p:sp>
+        <p:nvSpPr>
+          <p:cNvPr id="13" name="Text 2">
+            <a:extLst>
+              <a:ext uri="{FF2B5EF4-FFF2-40B4-BE49-F238E27FC236}">
+                <a16:creationId xmlns:a16="http://schemas.microsoft.com/office/drawing/2014/main" id="{D5BCE3DA-298E-3545-6760-EE4647D80310}"/>
+              </a:ext>
+            </a:extLst>
+          </p:cNvPr>
+          <p:cNvSpPr/>
+          <p:nvPr/>
+        </p:nvSpPr>
+        <p:spPr>
+          <a:xfrm>
+            <a:off x="1685331" y="823664"/>
+            <a:ext cx="1772022" cy="221456"/>
           </a:xfrm>
           <a:prstGeom prst="rect">
             <a:avLst/>
@@ -7474,37 +8487,54 @@
           <a:bodyPr wrap="none" lIns="0" tIns="0" rIns="0" bIns="0" rtlCol="0" anchor="t"/>
           <a:lstStyle/>
           <a:p>
-            <a:pPr marL="0" indent="0" algn="l">
+            <a:pPr marL="0" indent="0" algn="ctr">
               <a:lnSpc>
                 <a:spcPct val="104000"/>
               </a:lnSpc>
               <a:buNone/>
             </a:pPr>
             <a:r>
-              <a:rPr lang="en-US" sz="2550" dirty="0" err="1">
-                <a:solidFill>
-                  <a:srgbClr val="091C53"/>
+              <a:rPr lang="en-US" sz="1600" b="1" dirty="0">
+                <a:solidFill>
+                  <a:srgbClr val="1E3063"/>
                 </a:solidFill>
                 <a:latin typeface="Instrument Sans SemiBold" pitchFamily="34" charset="0"/>
                 <a:ea typeface="Instrument Sans SemiBold" pitchFamily="34" charset="-122"/>
                 <a:cs typeface="Instrument Sans SemiBold" pitchFamily="34" charset="-120"/>
               </a:rPr>
-              <a:t>Заключение</a:t>
-            </a:r>
-            <a:endParaRPr lang="en-US" sz="2550" dirty="0"/>
-          </a:p>
-        </p:txBody>
-      </p:sp>
-      <p:sp>
-        <p:nvSpPr>
-          <p:cNvPr id="3" name="Text 1"/>
+              <a:t>🎯 </a:t>
+            </a:r>
+            <a:r>
+              <a:rPr lang="ru-RU" sz="1600" b="1" dirty="0">
+                <a:solidFill>
+                  <a:srgbClr val="1E3063"/>
+                </a:solidFill>
+                <a:latin typeface="Instrument Sans SemiBold" pitchFamily="34" charset="0"/>
+                <a:ea typeface="Instrument Sans SemiBold" pitchFamily="34" charset="-122"/>
+                <a:cs typeface="Instrument Sans SemiBold" pitchFamily="34" charset="-120"/>
+              </a:rPr>
+              <a:t>РАЗРАБОТАНО:</a:t>
+            </a:r>
+            <a:endParaRPr lang="en-US" sz="1600" b="1" dirty="0"/>
+          </a:p>
+        </p:txBody>
+      </p:sp>
+      <p:sp>
+        <p:nvSpPr>
+          <p:cNvPr id="14" name="Text 3">
+            <a:extLst>
+              <a:ext uri="{FF2B5EF4-FFF2-40B4-BE49-F238E27FC236}">
+                <a16:creationId xmlns:a16="http://schemas.microsoft.com/office/drawing/2014/main" id="{AC5F61B5-4153-D06C-DBE9-F588F4FBF0C3}"/>
+              </a:ext>
+            </a:extLst>
+          </p:cNvPr>
           <p:cNvSpPr/>
           <p:nvPr/>
         </p:nvSpPr>
         <p:spPr>
           <a:xfrm>
-            <a:off x="457349" y="2111499"/>
-            <a:ext cx="3743325" cy="204118"/>
+            <a:off x="1056160" y="1181719"/>
+            <a:ext cx="3038773" cy="1144440"/>
           </a:xfrm>
           <a:prstGeom prst="rect">
             <a:avLst/>
@@ -7513,73 +8543,92 @@
           <a:ln/>
         </p:spPr>
         <p:txBody>
-          <a:bodyPr wrap="none" lIns="0" tIns="0" rIns="0" bIns="0" rtlCol="0" anchor="t"/>
+          <a:bodyPr wrap="square" lIns="0" tIns="0" rIns="0" bIns="0" rtlCol="0" anchor="t">
+            <a:noAutofit/>
+          </a:bodyPr>
           <a:lstStyle/>
           <a:p>
             <a:pPr marL="0" indent="0" algn="l">
               <a:lnSpc>
-                <a:spcPct val="104000"/>
+                <a:spcPct val="133000"/>
               </a:lnSpc>
               <a:buNone/>
             </a:pPr>
             <a:r>
-              <a:rPr lang="en-US" sz="1250" dirty="0" err="1">
-                <a:solidFill>
-                  <a:srgbClr val="091C53"/>
-                </a:solidFill>
-                <a:latin typeface="Instrument Sans SemiBold" pitchFamily="34" charset="0"/>
-                <a:ea typeface="Instrument Sans SemiBold" pitchFamily="34" charset="-122"/>
-                <a:cs typeface="Instrument Sans SemiBold" pitchFamily="34" charset="-120"/>
-              </a:rPr>
-              <a:t>Заключение</a:t>
-            </a:r>
-            <a:r>
-              <a:rPr lang="en-US" sz="1250" dirty="0">
-                <a:solidFill>
-                  <a:srgbClr val="091C53"/>
-                </a:solidFill>
-                <a:latin typeface="Instrument Sans SemiBold" pitchFamily="34" charset="0"/>
-                <a:ea typeface="Instrument Sans SemiBold" pitchFamily="34" charset="-122"/>
-                <a:cs typeface="Instrument Sans SemiBold" pitchFamily="34" charset="-120"/>
-              </a:rPr>
-              <a:t> </a:t>
-            </a:r>
-            <a:r>
-              <a:rPr lang="ru-RU" sz="1250" dirty="0">
-                <a:solidFill>
-                  <a:srgbClr val="091C53"/>
-                </a:solidFill>
-                <a:latin typeface="Instrument Sans SemiBold" pitchFamily="34" charset="0"/>
-                <a:ea typeface="Instrument Sans SemiBold" pitchFamily="34" charset="-122"/>
-                <a:cs typeface="Instrument Sans SemiBold" pitchFamily="34" charset="-120"/>
-              </a:rPr>
-              <a:t>и</a:t>
-            </a:r>
-            <a:r>
-              <a:rPr lang="en-US" sz="1250" dirty="0">
-                <a:solidFill>
-                  <a:srgbClr val="091C53"/>
-                </a:solidFill>
-                <a:latin typeface="Instrument Sans SemiBold" pitchFamily="34" charset="0"/>
-                <a:ea typeface="Instrument Sans SemiBold" pitchFamily="34" charset="-122"/>
-                <a:cs typeface="Instrument Sans SemiBold" pitchFamily="34" charset="-120"/>
-              </a:rPr>
-              <a:t> дальнейшие направления</a:t>
-            </a:r>
-            <a:endParaRPr lang="en-US" sz="1250" dirty="0"/>
-          </a:p>
-        </p:txBody>
-      </p:sp>
-      <p:sp>
-        <p:nvSpPr>
-          <p:cNvPr id="4" name="Text 2"/>
+              <a:rPr lang="ru-RU" sz="1400" dirty="0">
+                <a:solidFill>
+                  <a:srgbClr val="1E3063"/>
+                </a:solidFill>
+                <a:latin typeface="Instrument Sans Medium" pitchFamily="34" charset="0"/>
+                <a:ea typeface="Instrument Sans Medium" pitchFamily="34" charset="-122"/>
+                <a:cs typeface="Instrument Sans Medium" pitchFamily="34" charset="-120"/>
+              </a:rPr>
+              <a:t>GUI-приложение на C++/MFC для детекции временных </a:t>
+            </a:r>
+            <a:r>
+              <a:rPr lang="ru-RU" sz="1400" dirty="0" err="1">
+                <a:solidFill>
+                  <a:srgbClr val="1E3063"/>
+                </a:solidFill>
+                <a:latin typeface="Instrument Sans Medium" pitchFamily="34" charset="0"/>
+                <a:ea typeface="Instrument Sans Medium" pitchFamily="34" charset="-122"/>
+                <a:cs typeface="Instrument Sans Medium" pitchFamily="34" charset="-120"/>
+              </a:rPr>
+              <a:t>email</a:t>
+            </a:r>
+            <a:endParaRPr lang="en-US" sz="1400" dirty="0"/>
+          </a:p>
+        </p:txBody>
+      </p:sp>
+      <p:sp>
+        <p:nvSpPr>
+          <p:cNvPr id="15" name="Shape 1">
+            <a:extLst>
+              <a:ext uri="{FF2B5EF4-FFF2-40B4-BE49-F238E27FC236}">
+                <a16:creationId xmlns:a16="http://schemas.microsoft.com/office/drawing/2014/main" id="{2819B941-B7BA-1EE8-3535-5DBCF68E79F8}"/>
+              </a:ext>
+            </a:extLst>
+          </p:cNvPr>
           <p:cNvSpPr/>
           <p:nvPr/>
         </p:nvSpPr>
         <p:spPr>
           <a:xfrm>
-            <a:off x="457349" y="2436093"/>
-            <a:ext cx="5664845" cy="887611"/>
+            <a:off x="4572000" y="776287"/>
+            <a:ext cx="3351981" cy="1795463"/>
+          </a:xfrm>
+          <a:prstGeom prst="roundRect">
+            <a:avLst>
+              <a:gd name="adj" fmla="val 11207"/>
+            </a:avLst>
+          </a:prstGeom>
+          <a:solidFill>
+            <a:srgbClr val="FFFFFF"/>
+          </a:solidFill>
+          <a:ln w="19050">
+            <a:solidFill>
+              <a:srgbClr val="B4CCE3"/>
+            </a:solidFill>
+            <a:prstDash val="solid"/>
+          </a:ln>
+        </p:spPr>
+      </p:sp>
+      <p:sp>
+        <p:nvSpPr>
+          <p:cNvPr id="16" name="Text 2">
+            <a:extLst>
+              <a:ext uri="{FF2B5EF4-FFF2-40B4-BE49-F238E27FC236}">
+                <a16:creationId xmlns:a16="http://schemas.microsoft.com/office/drawing/2014/main" id="{2F598510-20E9-9E3C-3E74-72F033814F0B}"/>
+              </a:ext>
+            </a:extLst>
+          </p:cNvPr>
+          <p:cNvSpPr/>
+          <p:nvPr/>
+        </p:nvSpPr>
+        <p:spPr>
+          <a:xfrm>
+            <a:off x="5361979" y="823664"/>
+            <a:ext cx="1772022" cy="221456"/>
           </a:xfrm>
           <a:prstGeom prst="rect">
             <a:avLst/>
@@ -7588,86 +8637,57 @@
           <a:ln/>
         </p:spPr>
         <p:txBody>
-          <a:bodyPr wrap="square" lIns="0" tIns="0" rIns="0" bIns="0" rtlCol="0" anchor="t">
-            <a:normAutofit/>
-          </a:bodyPr>
-          <a:lstStyle/>
-          <a:p>
-            <a:pPr marL="342900" indent="-342900" algn="l">
+          <a:bodyPr wrap="none" lIns="0" tIns="0" rIns="0" bIns="0" rtlCol="0" anchor="t"/>
+          <a:lstStyle/>
+          <a:p>
+            <a:pPr marL="0" indent="0" algn="ctr">
               <a:lnSpc>
-                <a:spcPct val="128000"/>
+                <a:spcPct val="104000"/>
               </a:lnSpc>
-              <a:buSzPct val="100000"/>
-              <a:buChar char="•"/>
+              <a:buNone/>
             </a:pPr>
             <a:r>
-              <a:rPr lang="en-US" sz="1000" dirty="0">
+              <a:rPr lang="en-US" sz="1600" b="1" dirty="0">
                 <a:solidFill>
                   <a:srgbClr val="1E3063"/>
                 </a:solidFill>
-                <a:latin typeface="Instrument Sans Medium" pitchFamily="34" charset="0"/>
-                <a:ea typeface="Instrument Sans Medium" pitchFamily="34" charset="-122"/>
-                <a:cs typeface="Instrument Sans Medium" pitchFamily="34" charset="-120"/>
-              </a:rPr>
-              <a:t>Разработано GUI‑приложение на C++/MFC для детекции временных email.</a:t>
-            </a:r>
-            <a:endParaRPr lang="en-US" sz="1000" dirty="0"/>
-          </a:p>
-          <a:p>
-            <a:pPr marL="342900" indent="-342900" algn="l">
-              <a:lnSpc>
-                <a:spcPct val="128000"/>
-              </a:lnSpc>
-              <a:buSzPct val="100000"/>
-              <a:buChar char="•"/>
-            </a:pPr>
-            <a:r>
-              <a:rPr lang="en-US" sz="1000" dirty="0">
+                <a:latin typeface="Instrument Sans SemiBold" pitchFamily="34" charset="0"/>
+                <a:ea typeface="Instrument Sans SemiBold" pitchFamily="34" charset="-122"/>
+                <a:cs typeface="Instrument Sans SemiBold" pitchFamily="34" charset="-120"/>
+              </a:rPr>
+              <a:t>✅ </a:t>
+            </a:r>
+            <a:r>
+              <a:rPr lang="ru-RU" sz="1600" b="1" dirty="0">
                 <a:solidFill>
                   <a:srgbClr val="1E3063"/>
                 </a:solidFill>
-                <a:latin typeface="Instrument Sans Medium" pitchFamily="34" charset="0"/>
-                <a:ea typeface="Instrument Sans Medium" pitchFamily="34" charset="-122"/>
-                <a:cs typeface="Instrument Sans Medium" pitchFamily="34" charset="-120"/>
-              </a:rPr>
-              <a:t>Инструмент для администраторов и разработчиков форм </a:t>
-            </a:r>
-            <a:r>
-              <a:rPr lang="en-US" sz="1000" dirty="0" err="1">
-                <a:solidFill>
-                  <a:srgbClr val="1E3063"/>
-                </a:solidFill>
-                <a:latin typeface="Instrument Sans Medium" pitchFamily="34" charset="0"/>
-                <a:ea typeface="Instrument Sans Medium" pitchFamily="34" charset="-122"/>
-                <a:cs typeface="Instrument Sans Medium" pitchFamily="34" charset="-120"/>
-              </a:rPr>
-              <a:t>регистрации</a:t>
-            </a:r>
-            <a:r>
-              <a:rPr lang="en-US" sz="1000" dirty="0">
-                <a:solidFill>
-                  <a:srgbClr val="1E3063"/>
-                </a:solidFill>
-                <a:latin typeface="Instrument Sans Medium" pitchFamily="34" charset="0"/>
-                <a:ea typeface="Instrument Sans Medium" pitchFamily="34" charset="-122"/>
-                <a:cs typeface="Instrument Sans Medium" pitchFamily="34" charset="-120"/>
-              </a:rPr>
-              <a:t>.</a:t>
-            </a:r>
-            <a:endParaRPr lang="en-US" sz="1000" dirty="0"/>
-          </a:p>
-        </p:txBody>
-      </p:sp>
-      <p:sp>
-        <p:nvSpPr>
-          <p:cNvPr id="5" name="Text 3"/>
+                <a:latin typeface="Instrument Sans SemiBold" pitchFamily="34" charset="0"/>
+                <a:ea typeface="Instrument Sans SemiBold" pitchFamily="34" charset="-122"/>
+                <a:cs typeface="Instrument Sans SemiBold" pitchFamily="34" charset="-120"/>
+              </a:rPr>
+              <a:t>КЛЮЧЕВЫЕ ВОЗМОЖНОСТИ: </a:t>
+            </a:r>
+            <a:endParaRPr lang="en-US" sz="1600" b="1" dirty="0"/>
+          </a:p>
+        </p:txBody>
+      </p:sp>
+      <p:sp>
+        <p:nvSpPr>
+          <p:cNvPr id="17" name="Text 3">
+            <a:extLst>
+              <a:ext uri="{FF2B5EF4-FFF2-40B4-BE49-F238E27FC236}">
+                <a16:creationId xmlns:a16="http://schemas.microsoft.com/office/drawing/2014/main" id="{AFD94D5D-0FDD-295F-7168-F205F55B1126}"/>
+              </a:ext>
+            </a:extLst>
+          </p:cNvPr>
           <p:cNvSpPr/>
           <p:nvPr/>
         </p:nvSpPr>
         <p:spPr>
           <a:xfrm>
-            <a:off x="457349" y="3432125"/>
-            <a:ext cx="6122045" cy="200844"/>
+            <a:off x="4685021" y="1121938"/>
+            <a:ext cx="3125937" cy="1390031"/>
           </a:xfrm>
           <a:prstGeom prst="rect">
             <a:avLst/>
@@ -7676,17 +8696,20 @@
           <a:ln/>
         </p:spPr>
         <p:txBody>
-          <a:bodyPr wrap="none" lIns="0" tIns="0" rIns="0" bIns="0" rtlCol="0" anchor="t"/>
-          <a:lstStyle/>
-          <a:p>
-            <a:pPr marL="0" indent="0" algn="l">
+          <a:bodyPr wrap="square" lIns="0" tIns="0" rIns="0" bIns="0" rtlCol="0" anchor="t">
+            <a:noAutofit/>
+          </a:bodyPr>
+          <a:lstStyle/>
+          <a:p>
+            <a:pPr marL="285750" indent="-285750" algn="l">
               <a:lnSpc>
-                <a:spcPct val="128000"/>
+                <a:spcPct val="133000"/>
               </a:lnSpc>
-              <a:buNone/>
+              <a:buFont typeface="Arial" panose="020B0604020202020204" pitchFamily="34" charset="0"/>
+              <a:buChar char="•"/>
             </a:pPr>
             <a:r>
-              <a:rPr lang="en-US" sz="1000" dirty="0">
+              <a:rPr lang="ru-RU" sz="1400" dirty="0">
                 <a:solidFill>
                   <a:srgbClr val="1E3063"/>
                 </a:solidFill>
@@ -7694,27 +8717,543 @@
                 <a:ea typeface="Instrument Sans Medium" pitchFamily="34" charset="-122"/>
                 <a:cs typeface="Instrument Sans Medium" pitchFamily="34" charset="-120"/>
               </a:rPr>
-              <a:t>Репозиторий: </a:t>
-            </a:r>
-            <a:r>
-              <a:rPr lang="en-US" sz="1000" u="sng" dirty="0">
-                <a:solidFill>
-                  <a:srgbClr val="0540AD"/>
+              <a:t>Одиночная и пакетная проверка Поиск в базе за O(1)(</a:t>
+            </a:r>
+            <a:r>
+              <a:rPr lang="ru-RU" sz="1400" dirty="0" err="1">
+                <a:solidFill>
+                  <a:srgbClr val="1E3063"/>
                 </a:solidFill>
                 <a:latin typeface="Instrument Sans Medium" pitchFamily="34" charset="0"/>
                 <a:ea typeface="Instrument Sans Medium" pitchFamily="34" charset="-122"/>
                 <a:cs typeface="Instrument Sans Medium" pitchFamily="34" charset="-120"/>
-                <a:hlinkClick r:id="rId3">
-                  <a:extLst>
-                    <a:ext uri="{A12FA001-AC4F-418D-AE19-62706E023703}">
-                      <ahyp:hlinkClr xmlns:ahyp="http://schemas.microsoft.com/office/drawing/2018/hyperlinkcolor" val="tx"/>
-                    </a:ext>
-                  </a:extLst>
-                </a:hlinkClick>
-              </a:rPr>
-              <a:t>https://github.com/timzvorykin/TempMailChecker</a:t>
-            </a:r>
-            <a:endParaRPr lang="en-US" sz="1000" dirty="0"/>
+              </a:rPr>
+              <a:t>unordered_set</a:t>
+            </a:r>
+            <a:r>
+              <a:rPr lang="ru-RU" sz="1400" dirty="0">
+                <a:solidFill>
+                  <a:srgbClr val="1E3063"/>
+                </a:solidFill>
+                <a:latin typeface="Instrument Sans Medium" pitchFamily="34" charset="0"/>
+                <a:ea typeface="Instrument Sans Medium" pitchFamily="34" charset="-122"/>
+                <a:cs typeface="Instrument Sans Medium" pitchFamily="34" charset="-120"/>
+              </a:rPr>
+              <a:t>) </a:t>
+            </a:r>
+          </a:p>
+          <a:p>
+            <a:pPr marL="285750" indent="-285750" algn="l">
+              <a:lnSpc>
+                <a:spcPct val="133000"/>
+              </a:lnSpc>
+              <a:buFont typeface="Arial" panose="020B0604020202020204" pitchFamily="34" charset="0"/>
+              <a:buChar char="•"/>
+            </a:pPr>
+            <a:r>
+              <a:rPr lang="ru-RU" sz="1400" dirty="0">
+                <a:solidFill>
+                  <a:srgbClr val="1E3063"/>
+                </a:solidFill>
+                <a:latin typeface="Instrument Sans Medium" pitchFamily="34" charset="0"/>
+                <a:ea typeface="Instrument Sans Medium" pitchFamily="34" charset="-122"/>
+                <a:cs typeface="Instrument Sans Medium" pitchFamily="34" charset="-120"/>
+              </a:rPr>
+              <a:t>Экспорт отчёта в UTF-8 с BOM                          </a:t>
+            </a:r>
+          </a:p>
+          <a:p>
+            <a:pPr marL="285750" indent="-285750" algn="l">
+              <a:lnSpc>
+                <a:spcPct val="133000"/>
+              </a:lnSpc>
+              <a:buFont typeface="Arial" panose="020B0604020202020204" pitchFamily="34" charset="0"/>
+              <a:buChar char="•"/>
+            </a:pPr>
+            <a:r>
+              <a:rPr lang="ru-RU" sz="1400" dirty="0">
+                <a:solidFill>
+                  <a:srgbClr val="1E3063"/>
+                </a:solidFill>
+                <a:latin typeface="Instrument Sans Medium" pitchFamily="34" charset="0"/>
+                <a:ea typeface="Instrument Sans Medium" pitchFamily="34" charset="-122"/>
+                <a:cs typeface="Instrument Sans Medium" pitchFamily="34" charset="-120"/>
+              </a:rPr>
+              <a:t>Поддержка кириллицы</a:t>
+            </a:r>
+            <a:endParaRPr lang="en-US" sz="1400" dirty="0"/>
+          </a:p>
+        </p:txBody>
+      </p:sp>
+      <p:sp>
+        <p:nvSpPr>
+          <p:cNvPr id="19" name="Shape 1">
+            <a:extLst>
+              <a:ext uri="{FF2B5EF4-FFF2-40B4-BE49-F238E27FC236}">
+                <a16:creationId xmlns:a16="http://schemas.microsoft.com/office/drawing/2014/main" id="{DBD10A58-BBAE-CC61-A43D-97ABA66B0E78}"/>
+              </a:ext>
+            </a:extLst>
+          </p:cNvPr>
+          <p:cNvSpPr/>
+          <p:nvPr/>
+        </p:nvSpPr>
+        <p:spPr>
+          <a:xfrm>
+            <a:off x="895349" y="2752650"/>
+            <a:ext cx="3351981" cy="1795463"/>
+          </a:xfrm>
+          <a:prstGeom prst="roundRect">
+            <a:avLst>
+              <a:gd name="adj" fmla="val 11207"/>
+            </a:avLst>
+          </a:prstGeom>
+          <a:solidFill>
+            <a:srgbClr val="FFFFFF"/>
+          </a:solidFill>
+          <a:ln w="19050">
+            <a:solidFill>
+              <a:srgbClr val="B4CCE3"/>
+            </a:solidFill>
+            <a:prstDash val="solid"/>
+          </a:ln>
+        </p:spPr>
+      </p:sp>
+      <p:sp>
+        <p:nvSpPr>
+          <p:cNvPr id="20" name="Text 2">
+            <a:extLst>
+              <a:ext uri="{FF2B5EF4-FFF2-40B4-BE49-F238E27FC236}">
+                <a16:creationId xmlns:a16="http://schemas.microsoft.com/office/drawing/2014/main" id="{3281273F-09CC-7955-60E9-89579CD435B7}"/>
+              </a:ext>
+            </a:extLst>
+          </p:cNvPr>
+          <p:cNvSpPr/>
+          <p:nvPr/>
+        </p:nvSpPr>
+        <p:spPr>
+          <a:xfrm>
+            <a:off x="1685328" y="2800027"/>
+            <a:ext cx="1772022" cy="221456"/>
+          </a:xfrm>
+          <a:prstGeom prst="rect">
+            <a:avLst/>
+          </a:prstGeom>
+          <a:noFill/>
+          <a:ln/>
+        </p:spPr>
+        <p:txBody>
+          <a:bodyPr wrap="none" lIns="0" tIns="0" rIns="0" bIns="0" rtlCol="0" anchor="t"/>
+          <a:lstStyle/>
+          <a:p>
+            <a:pPr marL="0" indent="0" algn="ctr">
+              <a:lnSpc>
+                <a:spcPct val="104000"/>
+              </a:lnSpc>
+              <a:buNone/>
+            </a:pPr>
+            <a:r>
+              <a:rPr lang="en-US" sz="1600" b="1" dirty="0">
+                <a:solidFill>
+                  <a:srgbClr val="1E3063"/>
+                </a:solidFill>
+                <a:latin typeface="Instrument Sans SemiBold" pitchFamily="34" charset="0"/>
+                <a:ea typeface="Instrument Sans SemiBold" pitchFamily="34" charset="-122"/>
+                <a:cs typeface="Instrument Sans SemiBold" pitchFamily="34" charset="-120"/>
+              </a:rPr>
+              <a:t>📊 </a:t>
+            </a:r>
+            <a:r>
+              <a:rPr lang="ru-RU" sz="1600" b="1" dirty="0">
+                <a:solidFill>
+                  <a:srgbClr val="1E3063"/>
+                </a:solidFill>
+                <a:latin typeface="Instrument Sans SemiBold" pitchFamily="34" charset="0"/>
+                <a:ea typeface="Instrument Sans SemiBold" pitchFamily="34" charset="-122"/>
+                <a:cs typeface="Instrument Sans SemiBold" pitchFamily="34" charset="-120"/>
+              </a:rPr>
+              <a:t>ТЕСТИРОВАНИЕ:</a:t>
+            </a:r>
+            <a:endParaRPr lang="en-US" sz="1600" b="1" dirty="0"/>
+          </a:p>
+        </p:txBody>
+      </p:sp>
+      <p:sp>
+        <p:nvSpPr>
+          <p:cNvPr id="21" name="Text 3">
+            <a:extLst>
+              <a:ext uri="{FF2B5EF4-FFF2-40B4-BE49-F238E27FC236}">
+                <a16:creationId xmlns:a16="http://schemas.microsoft.com/office/drawing/2014/main" id="{C4C80F59-6C78-F2F4-1FF3-534054E7318F}"/>
+              </a:ext>
+            </a:extLst>
+          </p:cNvPr>
+          <p:cNvSpPr/>
+          <p:nvPr/>
+        </p:nvSpPr>
+        <p:spPr>
+          <a:xfrm>
+            <a:off x="1056157" y="3158082"/>
+            <a:ext cx="3038773" cy="1144440"/>
+          </a:xfrm>
+          <a:prstGeom prst="rect">
+            <a:avLst/>
+          </a:prstGeom>
+          <a:noFill/>
+          <a:ln/>
+        </p:spPr>
+        <p:txBody>
+          <a:bodyPr wrap="square" lIns="0" tIns="0" rIns="0" bIns="0" rtlCol="0" anchor="t">
+            <a:noAutofit/>
+          </a:bodyPr>
+          <a:lstStyle/>
+          <a:p>
+            <a:pPr marL="285750" indent="-285750" algn="l">
+              <a:lnSpc>
+                <a:spcPct val="133000"/>
+              </a:lnSpc>
+              <a:buFont typeface="Arial" panose="020B0604020202020204" pitchFamily="34" charset="0"/>
+              <a:buChar char="•"/>
+            </a:pPr>
+            <a:r>
+              <a:rPr lang="ru-RU" sz="1400" dirty="0">
+                <a:solidFill>
+                  <a:srgbClr val="1E3063"/>
+                </a:solidFill>
+                <a:latin typeface="Instrument Sans Medium" pitchFamily="34" charset="0"/>
+                <a:ea typeface="Instrument Sans Medium" pitchFamily="34" charset="-122"/>
+                <a:cs typeface="Instrument Sans Medium" pitchFamily="34" charset="-120"/>
+              </a:rPr>
+              <a:t>175 тестовых записей</a:t>
+            </a:r>
+          </a:p>
+          <a:p>
+            <a:pPr marL="285750" indent="-285750" algn="l">
+              <a:lnSpc>
+                <a:spcPct val="133000"/>
+              </a:lnSpc>
+              <a:buFont typeface="Arial" panose="020B0604020202020204" pitchFamily="34" charset="0"/>
+              <a:buChar char="•"/>
+            </a:pPr>
+            <a:r>
+              <a:rPr lang="ru-RU" sz="1400" dirty="0">
+                <a:solidFill>
+                  <a:srgbClr val="1E3063"/>
+                </a:solidFill>
+                <a:latin typeface="Instrument Sans Medium" pitchFamily="34" charset="0"/>
+                <a:ea typeface="Instrument Sans Medium" pitchFamily="34" charset="-122"/>
+                <a:cs typeface="Instrument Sans Medium" pitchFamily="34" charset="-120"/>
+              </a:rPr>
+              <a:t>55 временных / 63 постоянных / 57 некорректных</a:t>
+            </a:r>
+          </a:p>
+          <a:p>
+            <a:pPr marL="285750" indent="-285750" algn="l">
+              <a:lnSpc>
+                <a:spcPct val="133000"/>
+              </a:lnSpc>
+              <a:buFont typeface="Arial" panose="020B0604020202020204" pitchFamily="34" charset="0"/>
+              <a:buChar char="•"/>
+            </a:pPr>
+            <a:r>
+              <a:rPr lang="ru-RU" sz="1400" dirty="0">
+                <a:solidFill>
+                  <a:srgbClr val="1E3063"/>
+                </a:solidFill>
+                <a:latin typeface="Instrument Sans Medium" pitchFamily="34" charset="0"/>
+                <a:ea typeface="Instrument Sans Medium" pitchFamily="34" charset="-122"/>
+                <a:cs typeface="Instrument Sans Medium" pitchFamily="34" charset="-120"/>
+              </a:rPr>
+              <a:t>Все сценарии пройдены успешно</a:t>
+            </a:r>
+            <a:endParaRPr lang="en-US" sz="1400" dirty="0"/>
+          </a:p>
+        </p:txBody>
+      </p:sp>
+      <p:sp>
+        <p:nvSpPr>
+          <p:cNvPr id="22" name="Shape 1">
+            <a:extLst>
+              <a:ext uri="{FF2B5EF4-FFF2-40B4-BE49-F238E27FC236}">
+                <a16:creationId xmlns:a16="http://schemas.microsoft.com/office/drawing/2014/main" id="{CCEC316E-C14F-34DF-5141-F16D4F2BDE56}"/>
+              </a:ext>
+            </a:extLst>
+          </p:cNvPr>
+          <p:cNvSpPr/>
+          <p:nvPr/>
+        </p:nvSpPr>
+        <p:spPr>
+          <a:xfrm>
+            <a:off x="4572000" y="2752650"/>
+            <a:ext cx="3351981" cy="1795463"/>
+          </a:xfrm>
+          <a:prstGeom prst="roundRect">
+            <a:avLst>
+              <a:gd name="adj" fmla="val 11207"/>
+            </a:avLst>
+          </a:prstGeom>
+          <a:solidFill>
+            <a:srgbClr val="FFFFFF"/>
+          </a:solidFill>
+          <a:ln w="19050">
+            <a:solidFill>
+              <a:srgbClr val="B4CCE3"/>
+            </a:solidFill>
+            <a:prstDash val="solid"/>
+          </a:ln>
+        </p:spPr>
+      </p:sp>
+      <p:sp>
+        <p:nvSpPr>
+          <p:cNvPr id="23" name="Text 2">
+            <a:extLst>
+              <a:ext uri="{FF2B5EF4-FFF2-40B4-BE49-F238E27FC236}">
+                <a16:creationId xmlns:a16="http://schemas.microsoft.com/office/drawing/2014/main" id="{77F825AC-F1F7-5375-F4A9-EC9849E14354}"/>
+              </a:ext>
+            </a:extLst>
+          </p:cNvPr>
+          <p:cNvSpPr/>
+          <p:nvPr/>
+        </p:nvSpPr>
+        <p:spPr>
+          <a:xfrm>
+            <a:off x="4804653" y="2793354"/>
+            <a:ext cx="2886672" cy="221456"/>
+          </a:xfrm>
+          <a:prstGeom prst="rect">
+            <a:avLst/>
+          </a:prstGeom>
+          <a:noFill/>
+          <a:ln/>
+        </p:spPr>
+        <p:txBody>
+          <a:bodyPr wrap="none" lIns="0" tIns="0" rIns="0" bIns="0" rtlCol="0" anchor="t"/>
+          <a:lstStyle/>
+          <a:p>
+            <a:pPr marL="0" indent="0" algn="ctr">
+              <a:lnSpc>
+                <a:spcPct val="104000"/>
+              </a:lnSpc>
+              <a:buNone/>
+            </a:pPr>
+            <a:r>
+              <a:rPr lang="en-US" sz="1600" b="1" dirty="0">
+                <a:solidFill>
+                  <a:srgbClr val="1E3063"/>
+                </a:solidFill>
+                <a:latin typeface="Instrument Sans SemiBold" pitchFamily="34" charset="0"/>
+                <a:ea typeface="Instrument Sans SemiBold" pitchFamily="34" charset="-122"/>
+                <a:cs typeface="Instrument Sans SemiBold" pitchFamily="34" charset="-120"/>
+              </a:rPr>
+              <a:t>🚀 </a:t>
+            </a:r>
+            <a:r>
+              <a:rPr lang="ru-RU" sz="1600" b="1" dirty="0">
+                <a:solidFill>
+                  <a:srgbClr val="1E3063"/>
+                </a:solidFill>
+                <a:latin typeface="Instrument Sans SemiBold" pitchFamily="34" charset="0"/>
+                <a:ea typeface="Instrument Sans SemiBold" pitchFamily="34" charset="-122"/>
+                <a:cs typeface="Instrument Sans SemiBold" pitchFamily="34" charset="-120"/>
+              </a:rPr>
+              <a:t>НАПРАВЛЕНИЯ РАЗВИТИЯ:</a:t>
+            </a:r>
+            <a:endParaRPr lang="en-US" sz="1600" b="1" dirty="0"/>
+          </a:p>
+        </p:txBody>
+      </p:sp>
+      <p:sp>
+        <p:nvSpPr>
+          <p:cNvPr id="24" name="Text 3">
+            <a:extLst>
+              <a:ext uri="{FF2B5EF4-FFF2-40B4-BE49-F238E27FC236}">
+                <a16:creationId xmlns:a16="http://schemas.microsoft.com/office/drawing/2014/main" id="{B6133AA1-3EEE-6B97-55FD-D0D11AC882D6}"/>
+              </a:ext>
+            </a:extLst>
+          </p:cNvPr>
+          <p:cNvSpPr/>
+          <p:nvPr/>
+        </p:nvSpPr>
+        <p:spPr>
+          <a:xfrm>
+            <a:off x="4652402" y="3055514"/>
+            <a:ext cx="3191173" cy="1430686"/>
+          </a:xfrm>
+          <a:prstGeom prst="rect">
+            <a:avLst/>
+          </a:prstGeom>
+          <a:noFill/>
+          <a:ln/>
+        </p:spPr>
+        <p:txBody>
+          <a:bodyPr wrap="square" lIns="0" tIns="0" rIns="0" bIns="0" rtlCol="0" anchor="t">
+            <a:noAutofit/>
+          </a:bodyPr>
+          <a:lstStyle/>
+          <a:p>
+            <a:pPr marL="285750" indent="-285750" algn="l">
+              <a:lnSpc>
+                <a:spcPct val="133000"/>
+              </a:lnSpc>
+              <a:buFont typeface="Arial" panose="020B0604020202020204" pitchFamily="34" charset="0"/>
+              <a:buChar char="•"/>
+            </a:pPr>
+            <a:r>
+              <a:rPr lang="ru-RU" sz="1400" dirty="0" err="1">
+                <a:solidFill>
+                  <a:srgbClr val="1E3063"/>
+                </a:solidFill>
+                <a:latin typeface="Instrument Sans Medium" pitchFamily="34" charset="0"/>
+                <a:ea typeface="Instrument Sans Medium" pitchFamily="34" charset="-122"/>
+                <a:cs typeface="Instrument Sans Medium" pitchFamily="34" charset="-120"/>
+              </a:rPr>
+              <a:t>Автообновление</a:t>
+            </a:r>
+            <a:r>
+              <a:rPr lang="ru-RU" sz="1400" dirty="0">
+                <a:solidFill>
+                  <a:srgbClr val="1E3063"/>
+                </a:solidFill>
+                <a:latin typeface="Instrument Sans Medium" pitchFamily="34" charset="0"/>
+                <a:ea typeface="Instrument Sans Medium" pitchFamily="34" charset="-122"/>
+                <a:cs typeface="Instrument Sans Medium" pitchFamily="34" charset="-120"/>
+              </a:rPr>
+              <a:t> базы временных доменов</a:t>
+            </a:r>
+          </a:p>
+          <a:p>
+            <a:pPr marL="285750" indent="-285750" algn="l">
+              <a:lnSpc>
+                <a:spcPct val="133000"/>
+              </a:lnSpc>
+              <a:buFont typeface="Arial" panose="020B0604020202020204" pitchFamily="34" charset="0"/>
+              <a:buChar char="•"/>
+            </a:pPr>
+            <a:r>
+              <a:rPr lang="ru-RU" sz="1400" dirty="0">
+                <a:solidFill>
+                  <a:srgbClr val="1E3063"/>
+                </a:solidFill>
+                <a:latin typeface="Instrument Sans Medium" pitchFamily="34" charset="0"/>
+                <a:ea typeface="Instrument Sans Medium" pitchFamily="34" charset="-122"/>
+                <a:cs typeface="Instrument Sans Medium" pitchFamily="34" charset="-120"/>
+              </a:rPr>
+              <a:t>Интеграция в веб-сервисы</a:t>
+            </a:r>
+          </a:p>
+          <a:p>
+            <a:pPr marL="285750" indent="-285750" algn="l">
+              <a:lnSpc>
+                <a:spcPct val="133000"/>
+              </a:lnSpc>
+              <a:buFont typeface="Arial" panose="020B0604020202020204" pitchFamily="34" charset="0"/>
+              <a:buChar char="•"/>
+            </a:pPr>
+            <a:r>
+              <a:rPr lang="ru-RU" sz="1400" dirty="0">
+                <a:solidFill>
+                  <a:srgbClr val="1E3063"/>
+                </a:solidFill>
+                <a:latin typeface="Instrument Sans Medium" pitchFamily="34" charset="0"/>
+                <a:ea typeface="Instrument Sans Medium" pitchFamily="34" charset="-122"/>
+                <a:cs typeface="Instrument Sans Medium" pitchFamily="34" charset="-120"/>
+              </a:rPr>
+              <a:t>SMTP-проверка существования ящика</a:t>
+            </a:r>
+            <a:endParaRPr lang="en-US" sz="1400" dirty="0"/>
+          </a:p>
+        </p:txBody>
+      </p:sp>
+      <p:sp>
+        <p:nvSpPr>
+          <p:cNvPr id="25" name="Text 2">
+            <a:extLst>
+              <a:ext uri="{FF2B5EF4-FFF2-40B4-BE49-F238E27FC236}">
+                <a16:creationId xmlns:a16="http://schemas.microsoft.com/office/drawing/2014/main" id="{2A25CA04-5F88-5FCC-45E4-DBA95CD476D7}"/>
+              </a:ext>
+            </a:extLst>
+          </p:cNvPr>
+          <p:cNvSpPr/>
+          <p:nvPr/>
+        </p:nvSpPr>
+        <p:spPr>
+          <a:xfrm>
+            <a:off x="845314" y="4713323"/>
+            <a:ext cx="7453372" cy="403251"/>
+          </a:xfrm>
+          <a:prstGeom prst="rect">
+            <a:avLst/>
+          </a:prstGeom>
+          <a:noFill/>
+          <a:ln/>
+        </p:spPr>
+        <p:txBody>
+          <a:bodyPr wrap="none" lIns="0" tIns="0" rIns="0" bIns="0" rtlCol="0" anchor="t"/>
+          <a:lstStyle/>
+          <a:p>
+            <a:pPr marL="0" indent="0" algn="ctr">
+              <a:lnSpc>
+                <a:spcPct val="104000"/>
+              </a:lnSpc>
+              <a:buNone/>
+            </a:pPr>
+            <a:r>
+              <a:rPr lang="ru-RU" sz="1600" dirty="0">
+                <a:solidFill>
+                  <a:srgbClr val="1E3063"/>
+                </a:solidFill>
+                <a:latin typeface="Instrument Sans SemiBold" pitchFamily="34" charset="0"/>
+                <a:ea typeface="Instrument Sans SemiBold" pitchFamily="34" charset="-122"/>
+                <a:cs typeface="Instrument Sans SemiBold" pitchFamily="34" charset="-120"/>
+              </a:rPr>
+              <a:t>🔗 ИСХОДНЫЙ КОД: https://github.com/timzvorykin/TempMailChecker</a:t>
+            </a:r>
+            <a:endParaRPr lang="en-US" sz="1600" dirty="0"/>
+          </a:p>
+        </p:txBody>
+      </p:sp>
+      <p:sp>
+        <p:nvSpPr>
+          <p:cNvPr id="2" name="Text 0">
+            <a:extLst>
+              <a:ext uri="{FF2B5EF4-FFF2-40B4-BE49-F238E27FC236}">
+                <a16:creationId xmlns:a16="http://schemas.microsoft.com/office/drawing/2014/main" id="{4BCEF3EE-E024-6D9C-C0B4-BC06D6A1CE84}"/>
+              </a:ext>
+            </a:extLst>
+          </p:cNvPr>
+          <p:cNvSpPr/>
+          <p:nvPr/>
+        </p:nvSpPr>
+        <p:spPr>
+          <a:xfrm>
+            <a:off x="0" y="2969"/>
+            <a:ext cx="9144000" cy="687065"/>
+          </a:xfrm>
+          <a:prstGeom prst="rect">
+            <a:avLst/>
+          </a:prstGeom>
+          <a:noFill/>
+          <a:ln/>
+        </p:spPr>
+        <p:txBody>
+          <a:bodyPr wrap="none" lIns="0" tIns="0" rIns="0" bIns="0" rtlCol="0" anchor="t"/>
+          <a:lstStyle/>
+          <a:p>
+            <a:pPr marL="0" indent="0" algn="ctr">
+              <a:lnSpc>
+                <a:spcPct val="104000"/>
+              </a:lnSpc>
+              <a:buNone/>
+            </a:pPr>
+            <a:r>
+              <a:rPr lang="ru-RU" sz="2800" dirty="0">
+                <a:solidFill>
+                  <a:srgbClr val="091C53"/>
+                </a:solidFill>
+                <a:latin typeface="Instrument Sans SemiBold" pitchFamily="34" charset="0"/>
+                <a:ea typeface="Instrument Sans SemiBold" pitchFamily="34" charset="-122"/>
+                <a:cs typeface="Instrument Sans SemiBold" pitchFamily="34" charset="-120"/>
+              </a:rPr>
+              <a:t>Заключение</a:t>
+            </a:r>
           </a:p>
         </p:txBody>
       </p:sp>
